--- a/Training Materials/16. React with Redux/Slides/1. Intro to Redux/intro-to-redux-slides.pptx
+++ b/Training Materials/16. React with Redux/Slides/1. Intro to Redux/intro-to-redux-slides.pptx
@@ -5,7 +5,7 @@
     <p:sldMasterId id="2147483648" r:id="rId1"/>
   </p:sldMasterIdLst>
   <p:notesMasterIdLst>
-    <p:notesMasterId r:id="rId34"/>
+    <p:notesMasterId r:id="rId23"/>
   </p:notesMasterIdLst>
   <p:sldIdLst>
     <p:sldId id="256" r:id="rId2"/>
@@ -26,20 +26,9 @@
     <p:sldId id="271" r:id="rId17"/>
     <p:sldId id="272" r:id="rId18"/>
     <p:sldId id="273" r:id="rId19"/>
-    <p:sldId id="274" r:id="rId20"/>
-    <p:sldId id="275" r:id="rId21"/>
-    <p:sldId id="276" r:id="rId22"/>
-    <p:sldId id="277" r:id="rId23"/>
-    <p:sldId id="278" r:id="rId24"/>
-    <p:sldId id="279" r:id="rId25"/>
-    <p:sldId id="280" r:id="rId26"/>
-    <p:sldId id="281" r:id="rId27"/>
-    <p:sldId id="282" r:id="rId28"/>
-    <p:sldId id="283" r:id="rId29"/>
-    <p:sldId id="284" r:id="rId30"/>
-    <p:sldId id="285" r:id="rId31"/>
-    <p:sldId id="286" r:id="rId32"/>
-    <p:sldId id="287" r:id="rId33"/>
+    <p:sldId id="285" r:id="rId20"/>
+    <p:sldId id="286" r:id="rId21"/>
+    <p:sldId id="287" r:id="rId22"/>
   </p:sldIdLst>
   <p:sldSz cx="12192000" cy="6858000"/>
   <p:notesSz cx="12192000" cy="6858000"/>
@@ -236,7 +225,7 @@
           <a:p>
             <a:fld id="{3EFD42F7-718C-4B98-AAEC-167E6DDD60A7}" type="datetimeFigureOut">
               <a:rPr lang="en-US" smtClean="0"/>
-              <a:t>12/30/2024</a:t>
+              <a:t>11/20/2025</a:t>
             </a:fld>
             <a:endParaRPr lang="en-US"/>
           </a:p>
@@ -637,7 +626,7 @@
           <a:p>
             <a:fld id="{1D8BD707-D9CF-40AE-B4C6-C98DA3205C09}" type="datetimeFigureOut">
               <a:rPr lang="en-US"/>
-              <a:t>12/30/2024</a:t>
+              <a:t>11/20/2025</a:t>
             </a:fld>
             <a:endParaRPr lang="en-US"/>
           </a:p>
@@ -846,7 +835,7 @@
           <a:p>
             <a:fld id="{1D8BD707-D9CF-40AE-B4C6-C98DA3205C09}" type="datetimeFigureOut">
               <a:rPr lang="en-US"/>
-              <a:t>12/30/2024</a:t>
+              <a:t>11/20/2025</a:t>
             </a:fld>
             <a:endParaRPr lang="en-US"/>
           </a:p>
@@ -1062,7 +1051,7 @@
           <a:p>
             <a:fld id="{1D8BD707-D9CF-40AE-B4C6-C98DA3205C09}" type="datetimeFigureOut">
               <a:rPr lang="en-US"/>
-              <a:t>12/30/2024</a:t>
+              <a:t>11/20/2025</a:t>
             </a:fld>
             <a:endParaRPr lang="en-US"/>
           </a:p>
@@ -1212,7 +1201,7 @@
           <a:p>
             <a:fld id="{1D8BD707-D9CF-40AE-B4C6-C98DA3205C09}" type="datetimeFigureOut">
               <a:rPr lang="en-US"/>
-              <a:t>12/30/2024</a:t>
+              <a:t>11/20/2025</a:t>
             </a:fld>
             <a:endParaRPr lang="en-US"/>
           </a:p>
@@ -1333,7 +1322,7 @@
           <a:p>
             <a:fld id="{1D8BD707-D9CF-40AE-B4C6-C98DA3205C09}" type="datetimeFigureOut">
               <a:rPr lang="en-US"/>
-              <a:t>12/30/2024</a:t>
+              <a:t>11/20/2025</a:t>
             </a:fld>
             <a:endParaRPr lang="en-US"/>
           </a:p>
@@ -1560,7 +1549,7 @@
           <a:p>
             <a:fld id="{1D8BD707-D9CF-40AE-B4C6-C98DA3205C09}" type="datetimeFigureOut">
               <a:rPr lang="en-US"/>
-              <a:t>12/30/2024</a:t>
+              <a:t>11/20/2025</a:t>
             </a:fld>
             <a:endParaRPr lang="en-US"/>
           </a:p>
@@ -22711,8 +22700,8 @@
         </p:blipFill>
         <p:spPr>
           <a:xfrm>
-            <a:off x="8226297" y="2750820"/>
-            <a:ext cx="3411092" cy="548639"/>
+            <a:off x="8715756" y="2750820"/>
+            <a:ext cx="2945765" cy="548639"/>
           </a:xfrm>
           <a:prstGeom prst="rect">
             <a:avLst/>
@@ -22931,4043 +22920,6 @@
 </file>
 
 <file path=ppt/slides/slide20.xml><?xml version="1.0" encoding="utf-8"?>
-<p:sld xmlns:a="http://schemas.openxmlformats.org/drawingml/2006/main" xmlns:r="http://schemas.openxmlformats.org/officeDocument/2006/relationships" xmlns:p="http://schemas.openxmlformats.org/presentationml/2006/main" showMasterSp="0">
-  <p:cSld>
-    <p:spTree>
-      <p:nvGrpSpPr>
-        <p:cNvPr id="1" name=""/>
-        <p:cNvGrpSpPr/>
-        <p:nvPr/>
-      </p:nvGrpSpPr>
-      <p:grpSpPr>
-        <a:xfrm>
-          <a:off x="0" y="0"/>
-          <a:ext cx="0" cy="0"/>
-          <a:chOff x="0" y="0"/>
-          <a:chExt cx="0" cy="0"/>
-        </a:xfrm>
-      </p:grpSpPr>
-      <p:sp>
-        <p:nvSpPr>
-          <p:cNvPr id="2" name="object 2"/>
-          <p:cNvSpPr/>
-          <p:nvPr/>
-        </p:nvSpPr>
-        <p:spPr>
-          <a:xfrm>
-            <a:off x="0" y="0"/>
-            <a:ext cx="12192000" cy="6858000"/>
-          </a:xfrm>
-          <a:custGeom>
-            <a:avLst/>
-            <a:gdLst/>
-            <a:ahLst/>
-            <a:cxnLst/>
-            <a:rect l="l" t="t" r="r" b="b"/>
-            <a:pathLst>
-              <a:path w="12192000" h="6858000">
-                <a:moveTo>
-                  <a:pt x="12192000" y="0"/>
-                </a:moveTo>
-                <a:lnTo>
-                  <a:pt x="0" y="0"/>
-                </a:lnTo>
-                <a:lnTo>
-                  <a:pt x="0" y="6858000"/>
-                </a:lnTo>
-                <a:lnTo>
-                  <a:pt x="12192000" y="6858000"/>
-                </a:lnTo>
-                <a:lnTo>
-                  <a:pt x="12192000" y="0"/>
-                </a:lnTo>
-                <a:close/>
-              </a:path>
-            </a:pathLst>
-          </a:custGeom>
-          <a:solidFill>
-            <a:srgbClr val="2A9FBB"/>
-          </a:solidFill>
-        </p:spPr>
-        <p:txBody>
-          <a:bodyPr wrap="square" lIns="0" tIns="0" rIns="0" bIns="0" rtlCol="0"/>
-          <a:lstStyle/>
-          <a:p>
-            <a:endParaRPr/>
-          </a:p>
-        </p:txBody>
-      </p:sp>
-      <p:grpSp>
-        <p:nvGrpSpPr>
-          <p:cNvPr id="4" name="object 4"/>
-          <p:cNvGrpSpPr/>
-          <p:nvPr/>
-        </p:nvGrpSpPr>
-        <p:grpSpPr>
-          <a:xfrm>
-            <a:off x="4419346" y="2698064"/>
-            <a:ext cx="3601720" cy="1354455"/>
-            <a:chOff x="4419346" y="2698064"/>
-            <a:chExt cx="3601720" cy="1354455"/>
-          </a:xfrm>
-        </p:grpSpPr>
-        <p:pic>
-          <p:nvPicPr>
-            <p:cNvPr id="5" name="object 5"/>
-            <p:cNvPicPr/>
-            <p:nvPr/>
-          </p:nvPicPr>
-          <p:blipFill>
-            <a:blip r:embed="rId2" cstate="print"/>
-            <a:stretch>
-              <a:fillRect/>
-            </a:stretch>
-          </p:blipFill>
-          <p:spPr>
-            <a:xfrm>
-              <a:off x="4419346" y="2698064"/>
-              <a:ext cx="3601211" cy="731824"/>
-            </a:xfrm>
-            <a:prstGeom prst="rect">
-              <a:avLst/>
-            </a:prstGeom>
-          </p:spPr>
-        </p:pic>
-        <p:pic>
-          <p:nvPicPr>
-            <p:cNvPr id="6" name="object 6"/>
-            <p:cNvPicPr/>
-            <p:nvPr/>
-          </p:nvPicPr>
-          <p:blipFill>
-            <a:blip r:embed="rId3" cstate="print"/>
-            <a:stretch>
-              <a:fillRect/>
-            </a:stretch>
-          </p:blipFill>
-          <p:spPr>
-            <a:xfrm>
-              <a:off x="4449826" y="3320541"/>
-              <a:ext cx="3506597" cy="731520"/>
-            </a:xfrm>
-            <a:prstGeom prst="rect">
-              <a:avLst/>
-            </a:prstGeom>
-          </p:spPr>
-        </p:pic>
-      </p:grpSp>
-      <p:sp>
-        <p:nvSpPr>
-          <p:cNvPr id="7" name="Slide Number Placeholder 6"/>
-          <p:cNvSpPr>
-            <a:spLocks noGrp="1"/>
-          </p:cNvSpPr>
-          <p:nvPr>
-            <p:ph type="sldNum" sz="quarter" idx="7"/>
-          </p:nvPr>
-        </p:nvSpPr>
-        <p:spPr/>
-        <p:txBody>
-          <a:bodyPr/>
-          <a:lstStyle/>
-          <a:p>
-            <a:fld id="{B6F15528-21DE-4FAA-801E-634DDDAF4B2B}" type="slidenum">
-              <a:rPr/>
-              <a:t>20</a:t>
-            </a:fld>
-            <a:endParaRPr/>
-          </a:p>
-        </p:txBody>
-      </p:sp>
-    </p:spTree>
-  </p:cSld>
-  <p:clrMapOvr>
-    <a:masterClrMapping/>
-  </p:clrMapOvr>
-</p:sld>
-</file>
-
-<file path=ppt/slides/slide21.xml><?xml version="1.0" encoding="utf-8"?>
-<p:sld xmlns:a="http://schemas.openxmlformats.org/drawingml/2006/main" xmlns:r="http://schemas.openxmlformats.org/officeDocument/2006/relationships" xmlns:p="http://schemas.openxmlformats.org/presentationml/2006/main">
-  <p:cSld>
-    <p:spTree>
-      <p:nvGrpSpPr>
-        <p:cNvPr id="1" name=""/>
-        <p:cNvGrpSpPr/>
-        <p:nvPr/>
-      </p:nvGrpSpPr>
-      <p:grpSpPr>
-        <a:xfrm>
-          <a:off x="0" y="0"/>
-          <a:ext cx="0" cy="0"/>
-          <a:chOff x="0" y="0"/>
-          <a:chExt cx="0" cy="0"/>
-        </a:xfrm>
-      </p:grpSpPr>
-      <p:pic>
-        <p:nvPicPr>
-          <p:cNvPr id="2" name="object 2"/>
-          <p:cNvPicPr/>
-          <p:nvPr/>
-        </p:nvPicPr>
-        <p:blipFill>
-          <a:blip r:embed="rId2" cstate="print"/>
-          <a:stretch>
-            <a:fillRect/>
-          </a:stretch>
-        </p:blipFill>
-        <p:spPr>
-          <a:xfrm>
-            <a:off x="1110691" y="4569282"/>
-            <a:ext cx="2616835" cy="305104"/>
-          </a:xfrm>
-          <a:prstGeom prst="rect">
-            <a:avLst/>
-          </a:prstGeom>
-        </p:spPr>
-      </p:pic>
-      <p:pic>
-        <p:nvPicPr>
-          <p:cNvPr id="3" name="object 3"/>
-          <p:cNvPicPr/>
-          <p:nvPr/>
-        </p:nvPicPr>
-        <p:blipFill>
-          <a:blip r:embed="rId3" cstate="print"/>
-          <a:stretch>
-            <a:fillRect/>
-          </a:stretch>
-        </p:blipFill>
-        <p:spPr>
-          <a:xfrm>
-            <a:off x="2964179" y="549859"/>
-            <a:ext cx="6396736" cy="548944"/>
-          </a:xfrm>
-          <a:prstGeom prst="rect">
-            <a:avLst/>
-          </a:prstGeom>
-        </p:spPr>
-      </p:pic>
-      <p:pic>
-        <p:nvPicPr>
-          <p:cNvPr id="4" name="object 4"/>
-          <p:cNvPicPr/>
-          <p:nvPr/>
-        </p:nvPicPr>
-        <p:blipFill>
-          <a:blip r:embed="rId4" cstate="print"/>
-          <a:stretch>
-            <a:fillRect/>
-          </a:stretch>
-        </p:blipFill>
-        <p:spPr>
-          <a:xfrm>
-            <a:off x="5619241" y="4569282"/>
-            <a:ext cx="1109471" cy="305104"/>
-          </a:xfrm>
-          <a:prstGeom prst="rect">
-            <a:avLst/>
-          </a:prstGeom>
-        </p:spPr>
-      </p:pic>
-      <p:pic>
-        <p:nvPicPr>
-          <p:cNvPr id="5" name="object 5"/>
-          <p:cNvPicPr/>
-          <p:nvPr/>
-        </p:nvPicPr>
-        <p:blipFill>
-          <a:blip r:embed="rId5" cstate="print"/>
-          <a:stretch>
-            <a:fillRect/>
-          </a:stretch>
-        </p:blipFill>
-        <p:spPr>
-          <a:xfrm>
-            <a:off x="9424161" y="4569282"/>
-            <a:ext cx="948029" cy="305104"/>
-          </a:xfrm>
-          <a:prstGeom prst="rect">
-            <a:avLst/>
-          </a:prstGeom>
-        </p:spPr>
-      </p:pic>
-      <p:pic>
-        <p:nvPicPr>
-          <p:cNvPr id="6" name="object 6"/>
-          <p:cNvPicPr/>
-          <p:nvPr/>
-        </p:nvPicPr>
-        <p:blipFill>
-          <a:blip r:embed="rId6" cstate="print"/>
-          <a:stretch>
-            <a:fillRect/>
-          </a:stretch>
-        </p:blipFill>
-        <p:spPr>
-          <a:xfrm>
-            <a:off x="8715042" y="1890609"/>
-            <a:ext cx="2223956" cy="2310741"/>
-          </a:xfrm>
-          <a:prstGeom prst="rect">
-            <a:avLst/>
-          </a:prstGeom>
-        </p:spPr>
-      </p:pic>
-      <p:pic>
-        <p:nvPicPr>
-          <p:cNvPr id="7" name="object 7"/>
-          <p:cNvPicPr/>
-          <p:nvPr/>
-        </p:nvPicPr>
-        <p:blipFill>
-          <a:blip r:embed="rId7" cstate="print"/>
-          <a:stretch>
-            <a:fillRect/>
-          </a:stretch>
-        </p:blipFill>
-        <p:spPr>
-          <a:xfrm>
-            <a:off x="1528018" y="1867842"/>
-            <a:ext cx="1652114" cy="2359308"/>
-          </a:xfrm>
-          <a:prstGeom prst="rect">
-            <a:avLst/>
-          </a:prstGeom>
-        </p:spPr>
-      </p:pic>
-      <p:pic>
-        <p:nvPicPr>
-          <p:cNvPr id="8" name="object 8"/>
-          <p:cNvPicPr/>
-          <p:nvPr/>
-        </p:nvPicPr>
-        <p:blipFill>
-          <a:blip r:embed="rId8" cstate="print"/>
-          <a:stretch>
-            <a:fillRect/>
-          </a:stretch>
-        </p:blipFill>
-        <p:spPr>
-          <a:xfrm>
-            <a:off x="4916046" y="1869569"/>
-            <a:ext cx="2353648" cy="2353648"/>
-          </a:xfrm>
-          <a:prstGeom prst="rect">
-            <a:avLst/>
-          </a:prstGeom>
-        </p:spPr>
-      </p:pic>
-      <p:sp>
-        <p:nvSpPr>
-          <p:cNvPr id="9" name="Slide Number Placeholder 8"/>
-          <p:cNvSpPr>
-            <a:spLocks noGrp="1"/>
-          </p:cNvSpPr>
-          <p:nvPr>
-            <p:ph type="sldNum" sz="quarter" idx="7"/>
-          </p:nvPr>
-        </p:nvSpPr>
-        <p:spPr/>
-        <p:txBody>
-          <a:bodyPr/>
-          <a:lstStyle/>
-          <a:p>
-            <a:fld id="{B6F15528-21DE-4FAA-801E-634DDDAF4B2B}" type="slidenum">
-              <a:rPr/>
-              <a:t>21</a:t>
-            </a:fld>
-            <a:endParaRPr/>
-          </a:p>
-        </p:txBody>
-      </p:sp>
-    </p:spTree>
-  </p:cSld>
-  <p:clrMapOvr>
-    <a:masterClrMapping/>
-  </p:clrMapOvr>
-</p:sld>
-</file>
-
-<file path=ppt/slides/slide22.xml><?xml version="1.0" encoding="utf-8"?>
-<p:sld xmlns:a="http://schemas.openxmlformats.org/drawingml/2006/main" xmlns:r="http://schemas.openxmlformats.org/officeDocument/2006/relationships" xmlns:p="http://schemas.openxmlformats.org/presentationml/2006/main">
-  <p:cSld>
-    <p:spTree>
-      <p:nvGrpSpPr>
-        <p:cNvPr id="1" name=""/>
-        <p:cNvGrpSpPr/>
-        <p:nvPr/>
-      </p:nvGrpSpPr>
-      <p:grpSpPr>
-        <a:xfrm>
-          <a:off x="0" y="0"/>
-          <a:ext cx="0" cy="0"/>
-          <a:chOff x="0" y="0"/>
-          <a:chExt cx="0" cy="0"/>
-        </a:xfrm>
-      </p:grpSpPr>
-      <p:pic>
-        <p:nvPicPr>
-          <p:cNvPr id="2" name="object 2"/>
-          <p:cNvPicPr/>
-          <p:nvPr/>
-        </p:nvPicPr>
-        <p:blipFill>
-          <a:blip r:embed="rId2" cstate="print"/>
-          <a:stretch>
-            <a:fillRect/>
-          </a:stretch>
-        </p:blipFill>
-        <p:spPr>
-          <a:xfrm>
-            <a:off x="1173636" y="1867056"/>
-            <a:ext cx="2360993" cy="2360993"/>
-          </a:xfrm>
-          <a:prstGeom prst="rect">
-            <a:avLst/>
-          </a:prstGeom>
-        </p:spPr>
-      </p:pic>
-      <p:pic>
-        <p:nvPicPr>
-          <p:cNvPr id="3" name="object 3"/>
-          <p:cNvPicPr/>
-          <p:nvPr/>
-        </p:nvPicPr>
-        <p:blipFill>
-          <a:blip r:embed="rId3" cstate="print"/>
-          <a:stretch>
-            <a:fillRect/>
-          </a:stretch>
-        </p:blipFill>
-        <p:spPr>
-          <a:xfrm>
-            <a:off x="5166928" y="1872056"/>
-            <a:ext cx="1851530" cy="2348319"/>
-          </a:xfrm>
-          <a:prstGeom prst="rect">
-            <a:avLst/>
-          </a:prstGeom>
-        </p:spPr>
-      </p:pic>
-      <p:pic>
-        <p:nvPicPr>
-          <p:cNvPr id="4" name="object 4"/>
-          <p:cNvPicPr/>
-          <p:nvPr/>
-        </p:nvPicPr>
-        <p:blipFill>
-          <a:blip r:embed="rId4" cstate="print"/>
-          <a:stretch>
-            <a:fillRect/>
-          </a:stretch>
-        </p:blipFill>
-        <p:spPr>
-          <a:xfrm>
-            <a:off x="8858071" y="1884264"/>
-            <a:ext cx="1940325" cy="2324337"/>
-          </a:xfrm>
-          <a:prstGeom prst="rect">
-            <a:avLst/>
-          </a:prstGeom>
-        </p:spPr>
-      </p:pic>
-      <p:pic>
-        <p:nvPicPr>
-          <p:cNvPr id="5" name="object 5"/>
-          <p:cNvPicPr/>
-          <p:nvPr/>
-        </p:nvPicPr>
-        <p:blipFill>
-          <a:blip r:embed="rId5" cstate="print"/>
-          <a:stretch>
-            <a:fillRect/>
-          </a:stretch>
-        </p:blipFill>
-        <p:spPr>
-          <a:xfrm>
-            <a:off x="1757426" y="4569282"/>
-            <a:ext cx="1342389" cy="305104"/>
-          </a:xfrm>
-          <a:prstGeom prst="rect">
-            <a:avLst/>
-          </a:prstGeom>
-        </p:spPr>
-      </p:pic>
-      <p:pic>
-        <p:nvPicPr>
-          <p:cNvPr id="6" name="object 6"/>
-          <p:cNvPicPr/>
-          <p:nvPr/>
-        </p:nvPicPr>
-        <p:blipFill>
-          <a:blip r:embed="rId6" cstate="print"/>
-          <a:stretch>
-            <a:fillRect/>
-          </a:stretch>
-        </p:blipFill>
-        <p:spPr>
-          <a:xfrm>
-            <a:off x="3569461" y="549859"/>
-            <a:ext cx="5228717" cy="548944"/>
-          </a:xfrm>
-          <a:prstGeom prst="rect">
-            <a:avLst/>
-          </a:prstGeom>
-        </p:spPr>
-      </p:pic>
-      <p:pic>
-        <p:nvPicPr>
-          <p:cNvPr id="7" name="object 7"/>
-          <p:cNvPicPr/>
-          <p:nvPr/>
-        </p:nvPicPr>
-        <p:blipFill>
-          <a:blip r:embed="rId7" cstate="print"/>
-          <a:stretch>
-            <a:fillRect/>
-          </a:stretch>
-        </p:blipFill>
-        <p:spPr>
-          <a:xfrm>
-            <a:off x="5413502" y="4569282"/>
-            <a:ext cx="1520825" cy="305104"/>
-          </a:xfrm>
-          <a:prstGeom prst="rect">
-            <a:avLst/>
-          </a:prstGeom>
-        </p:spPr>
-      </p:pic>
-      <p:pic>
-        <p:nvPicPr>
-          <p:cNvPr id="8" name="object 8"/>
-          <p:cNvPicPr/>
-          <p:nvPr/>
-        </p:nvPicPr>
-        <p:blipFill>
-          <a:blip r:embed="rId8" cstate="print"/>
-          <a:stretch>
-            <a:fillRect/>
-          </a:stretch>
-        </p:blipFill>
-        <p:spPr>
-          <a:xfrm>
-            <a:off x="9018778" y="4569282"/>
-            <a:ext cx="1758696" cy="305104"/>
-          </a:xfrm>
-          <a:prstGeom prst="rect">
-            <a:avLst/>
-          </a:prstGeom>
-        </p:spPr>
-      </p:pic>
-      <p:sp>
-        <p:nvSpPr>
-          <p:cNvPr id="9" name="Slide Number Placeholder 8"/>
-          <p:cNvSpPr>
-            <a:spLocks noGrp="1"/>
-          </p:cNvSpPr>
-          <p:nvPr>
-            <p:ph type="sldNum" sz="quarter" idx="7"/>
-          </p:nvPr>
-        </p:nvSpPr>
-        <p:spPr/>
-        <p:txBody>
-          <a:bodyPr/>
-          <a:lstStyle/>
-          <a:p>
-            <a:fld id="{B6F15528-21DE-4FAA-801E-634DDDAF4B2B}" type="slidenum">
-              <a:rPr/>
-              <a:t>22</a:t>
-            </a:fld>
-            <a:endParaRPr/>
-          </a:p>
-        </p:txBody>
-      </p:sp>
-    </p:spTree>
-  </p:cSld>
-  <p:clrMapOvr>
-    <a:masterClrMapping/>
-  </p:clrMapOvr>
-</p:sld>
-</file>
-
-<file path=ppt/slides/slide23.xml><?xml version="1.0" encoding="utf-8"?>
-<p:sld xmlns:a="http://schemas.openxmlformats.org/drawingml/2006/main" xmlns:r="http://schemas.openxmlformats.org/officeDocument/2006/relationships" xmlns:p="http://schemas.openxmlformats.org/presentationml/2006/main">
-  <p:cSld>
-    <p:spTree>
-      <p:nvGrpSpPr>
-        <p:cNvPr id="1" name=""/>
-        <p:cNvGrpSpPr/>
-        <p:nvPr/>
-      </p:nvGrpSpPr>
-      <p:grpSpPr>
-        <a:xfrm>
-          <a:off x="0" y="0"/>
-          <a:ext cx="0" cy="0"/>
-          <a:chOff x="0" y="0"/>
-          <a:chExt cx="0" cy="0"/>
-        </a:xfrm>
-      </p:grpSpPr>
-      <p:pic>
-        <p:nvPicPr>
-          <p:cNvPr id="2" name="object 2"/>
-          <p:cNvPicPr/>
-          <p:nvPr/>
-        </p:nvPicPr>
-        <p:blipFill>
-          <a:blip r:embed="rId2" cstate="print"/>
-          <a:stretch>
-            <a:fillRect/>
-          </a:stretch>
-        </p:blipFill>
-        <p:spPr>
-          <a:xfrm>
-            <a:off x="764438" y="1762632"/>
-            <a:ext cx="815339" cy="365760"/>
-          </a:xfrm>
-          <a:prstGeom prst="rect">
-            <a:avLst/>
-          </a:prstGeom>
-        </p:spPr>
-      </p:pic>
-      <p:pic>
-        <p:nvPicPr>
-          <p:cNvPr id="3" name="object 3"/>
-          <p:cNvPicPr/>
-          <p:nvPr/>
-        </p:nvPicPr>
-        <p:blipFill>
-          <a:blip r:embed="rId3" cstate="print"/>
-          <a:stretch>
-            <a:fillRect/>
-          </a:stretch>
-        </p:blipFill>
-        <p:spPr>
-          <a:xfrm>
-            <a:off x="6391655" y="1762632"/>
-            <a:ext cx="1167142" cy="365760"/>
-          </a:xfrm>
-          <a:prstGeom prst="rect">
-            <a:avLst/>
-          </a:prstGeom>
-        </p:spPr>
-      </p:pic>
-      <p:pic>
-        <p:nvPicPr>
-          <p:cNvPr id="4" name="object 4"/>
-          <p:cNvPicPr/>
-          <p:nvPr/>
-        </p:nvPicPr>
-        <p:blipFill>
-          <a:blip r:embed="rId4" cstate="print"/>
-          <a:stretch>
-            <a:fillRect/>
-          </a:stretch>
-        </p:blipFill>
-        <p:spPr>
-          <a:xfrm>
-            <a:off x="4477765" y="549859"/>
-            <a:ext cx="3391153" cy="548944"/>
-          </a:xfrm>
-          <a:prstGeom prst="rect">
-            <a:avLst/>
-          </a:prstGeom>
-        </p:spPr>
-      </p:pic>
-      <p:grpSp>
-        <p:nvGrpSpPr>
-          <p:cNvPr id="5" name="object 5"/>
-          <p:cNvGrpSpPr/>
-          <p:nvPr/>
-        </p:nvGrpSpPr>
-        <p:grpSpPr>
-          <a:xfrm>
-            <a:off x="2578607" y="5658611"/>
-            <a:ext cx="1594485" cy="690880"/>
-            <a:chOff x="2578607" y="5658611"/>
-            <a:chExt cx="1594485" cy="690880"/>
-          </a:xfrm>
-        </p:grpSpPr>
-        <p:sp>
-          <p:nvSpPr>
-            <p:cNvPr id="6" name="object 6"/>
-            <p:cNvSpPr/>
-            <p:nvPr/>
-          </p:nvSpPr>
-          <p:spPr>
-            <a:xfrm>
-              <a:off x="2578607" y="5658611"/>
-              <a:ext cx="1594485" cy="690880"/>
-            </a:xfrm>
-            <a:custGeom>
-              <a:avLst/>
-              <a:gdLst/>
-              <a:ahLst/>
-              <a:cxnLst/>
-              <a:rect l="l" t="t" r="r" b="b"/>
-              <a:pathLst>
-                <a:path w="1594485" h="690879">
-                  <a:moveTo>
-                    <a:pt x="1594104" y="0"/>
-                  </a:moveTo>
-                  <a:lnTo>
-                    <a:pt x="0" y="0"/>
-                  </a:lnTo>
-                  <a:lnTo>
-                    <a:pt x="0" y="690372"/>
-                  </a:lnTo>
-                  <a:lnTo>
-                    <a:pt x="1594104" y="690372"/>
-                  </a:lnTo>
-                  <a:lnTo>
-                    <a:pt x="1594104" y="0"/>
-                  </a:lnTo>
-                  <a:close/>
-                </a:path>
-              </a:pathLst>
-            </a:custGeom>
-            <a:solidFill>
-              <a:srgbClr val="2A9FBB"/>
-            </a:solidFill>
-          </p:spPr>
-          <p:txBody>
-            <a:bodyPr wrap="square" lIns="0" tIns="0" rIns="0" bIns="0" rtlCol="0"/>
-            <a:lstStyle/>
-            <a:p>
-              <a:endParaRPr/>
-            </a:p>
-          </p:txBody>
-        </p:sp>
-        <p:pic>
-          <p:nvPicPr>
-            <p:cNvPr id="7" name="object 7"/>
-            <p:cNvPicPr/>
-            <p:nvPr/>
-          </p:nvPicPr>
-          <p:blipFill>
-            <a:blip r:embed="rId5" cstate="print"/>
-            <a:stretch>
-              <a:fillRect/>
-            </a:stretch>
-          </p:blipFill>
-          <p:spPr>
-            <a:xfrm>
-              <a:off x="3045205" y="5868009"/>
-              <a:ext cx="791870" cy="274320"/>
-            </a:xfrm>
-            <a:prstGeom prst="rect">
-              <a:avLst/>
-            </a:prstGeom>
-          </p:spPr>
-        </p:pic>
-      </p:grpSp>
-      <p:grpSp>
-        <p:nvGrpSpPr>
-          <p:cNvPr id="8" name="object 8"/>
-          <p:cNvGrpSpPr/>
-          <p:nvPr/>
-        </p:nvGrpSpPr>
-        <p:grpSpPr>
-          <a:xfrm>
-            <a:off x="2578607" y="1981200"/>
-            <a:ext cx="1594485" cy="783590"/>
-            <a:chOff x="2578607" y="1981200"/>
-            <a:chExt cx="1594485" cy="783590"/>
-          </a:xfrm>
-        </p:grpSpPr>
-        <p:sp>
-          <p:nvSpPr>
-            <p:cNvPr id="9" name="object 9"/>
-            <p:cNvSpPr/>
-            <p:nvPr/>
-          </p:nvSpPr>
-          <p:spPr>
-            <a:xfrm>
-              <a:off x="2578607" y="1981200"/>
-              <a:ext cx="1594485" cy="783590"/>
-            </a:xfrm>
-            <a:custGeom>
-              <a:avLst/>
-              <a:gdLst/>
-              <a:ahLst/>
-              <a:cxnLst/>
-              <a:rect l="l" t="t" r="r" b="b"/>
-              <a:pathLst>
-                <a:path w="1594485" h="783589">
-                  <a:moveTo>
-                    <a:pt x="1594104" y="0"/>
-                  </a:moveTo>
-                  <a:lnTo>
-                    <a:pt x="0" y="0"/>
-                  </a:lnTo>
-                  <a:lnTo>
-                    <a:pt x="0" y="783336"/>
-                  </a:lnTo>
-                  <a:lnTo>
-                    <a:pt x="1594104" y="783336"/>
-                  </a:lnTo>
-                  <a:lnTo>
-                    <a:pt x="1594104" y="0"/>
-                  </a:lnTo>
-                  <a:close/>
-                </a:path>
-              </a:pathLst>
-            </a:custGeom>
-            <a:solidFill>
-              <a:srgbClr val="2A9FBB"/>
-            </a:solidFill>
-          </p:spPr>
-          <p:txBody>
-            <a:bodyPr wrap="square" lIns="0" tIns="0" rIns="0" bIns="0" rtlCol="0"/>
-            <a:lstStyle/>
-            <a:p>
-              <a:endParaRPr/>
-            </a:p>
-          </p:txBody>
-        </p:sp>
-        <p:pic>
-          <p:nvPicPr>
-            <p:cNvPr id="10" name="object 10"/>
-            <p:cNvPicPr/>
-            <p:nvPr/>
-          </p:nvPicPr>
-          <p:blipFill>
-            <a:blip r:embed="rId6" cstate="print"/>
-            <a:stretch>
-              <a:fillRect/>
-            </a:stretch>
-          </p:blipFill>
-          <p:spPr>
-            <a:xfrm>
-              <a:off x="2997961" y="2235961"/>
-              <a:ext cx="881888" cy="274320"/>
-            </a:xfrm>
-            <a:prstGeom prst="rect">
-              <a:avLst/>
-            </a:prstGeom>
-          </p:spPr>
-        </p:pic>
-      </p:grpSp>
-      <p:grpSp>
-        <p:nvGrpSpPr>
-          <p:cNvPr id="11" name="object 11"/>
-          <p:cNvGrpSpPr/>
-          <p:nvPr/>
-        </p:nvGrpSpPr>
-        <p:grpSpPr>
-          <a:xfrm>
-            <a:off x="2577083" y="3302508"/>
-            <a:ext cx="1595755" cy="629920"/>
-            <a:chOff x="2577083" y="3302508"/>
-            <a:chExt cx="1595755" cy="629920"/>
-          </a:xfrm>
-        </p:grpSpPr>
-        <p:sp>
-          <p:nvSpPr>
-            <p:cNvPr id="12" name="object 12"/>
-            <p:cNvSpPr/>
-            <p:nvPr/>
-          </p:nvSpPr>
-          <p:spPr>
-            <a:xfrm>
-              <a:off x="2577083" y="3302508"/>
-              <a:ext cx="1595755" cy="629920"/>
-            </a:xfrm>
-            <a:custGeom>
-              <a:avLst/>
-              <a:gdLst/>
-              <a:ahLst/>
-              <a:cxnLst/>
-              <a:rect l="l" t="t" r="r" b="b"/>
-              <a:pathLst>
-                <a:path w="1595754" h="629920">
-                  <a:moveTo>
-                    <a:pt x="1595628" y="0"/>
-                  </a:moveTo>
-                  <a:lnTo>
-                    <a:pt x="0" y="0"/>
-                  </a:lnTo>
-                  <a:lnTo>
-                    <a:pt x="0" y="629412"/>
-                  </a:lnTo>
-                  <a:lnTo>
-                    <a:pt x="1595628" y="629412"/>
-                  </a:lnTo>
-                  <a:lnTo>
-                    <a:pt x="1595628" y="0"/>
-                  </a:lnTo>
-                  <a:close/>
-                </a:path>
-              </a:pathLst>
-            </a:custGeom>
-            <a:solidFill>
-              <a:srgbClr val="2A9FBB"/>
-            </a:solidFill>
-          </p:spPr>
-          <p:txBody>
-            <a:bodyPr wrap="square" lIns="0" tIns="0" rIns="0" bIns="0" rtlCol="0"/>
-            <a:lstStyle/>
-            <a:p>
-              <a:endParaRPr/>
-            </a:p>
-          </p:txBody>
-        </p:sp>
-        <p:pic>
-          <p:nvPicPr>
-            <p:cNvPr id="13" name="object 13"/>
-            <p:cNvPicPr/>
-            <p:nvPr/>
-          </p:nvPicPr>
-          <p:blipFill>
-            <a:blip r:embed="rId7" cstate="print"/>
-            <a:stretch>
-              <a:fillRect/>
-            </a:stretch>
-          </p:blipFill>
-          <p:spPr>
-            <a:xfrm>
-              <a:off x="2755391" y="3480765"/>
-              <a:ext cx="1362963" cy="274624"/>
-            </a:xfrm>
-            <a:prstGeom prst="rect">
-              <a:avLst/>
-            </a:prstGeom>
-          </p:spPr>
-        </p:pic>
-      </p:grpSp>
-      <p:grpSp>
-        <p:nvGrpSpPr>
-          <p:cNvPr id="14" name="object 14"/>
-          <p:cNvGrpSpPr/>
-          <p:nvPr/>
-        </p:nvGrpSpPr>
-        <p:grpSpPr>
-          <a:xfrm>
-            <a:off x="2578607" y="4471415"/>
-            <a:ext cx="1594485" cy="650875"/>
-            <a:chOff x="2578607" y="4471415"/>
-            <a:chExt cx="1594485" cy="650875"/>
-          </a:xfrm>
-        </p:grpSpPr>
-        <p:sp>
-          <p:nvSpPr>
-            <p:cNvPr id="15" name="object 15"/>
-            <p:cNvSpPr/>
-            <p:nvPr/>
-          </p:nvSpPr>
-          <p:spPr>
-            <a:xfrm>
-              <a:off x="2578607" y="4471415"/>
-              <a:ext cx="1594485" cy="650875"/>
-            </a:xfrm>
-            <a:custGeom>
-              <a:avLst/>
-              <a:gdLst/>
-              <a:ahLst/>
-              <a:cxnLst/>
-              <a:rect l="l" t="t" r="r" b="b"/>
-              <a:pathLst>
-                <a:path w="1594485" h="650875">
-                  <a:moveTo>
-                    <a:pt x="1594104" y="0"/>
-                  </a:moveTo>
-                  <a:lnTo>
-                    <a:pt x="0" y="0"/>
-                  </a:lnTo>
-                  <a:lnTo>
-                    <a:pt x="0" y="650748"/>
-                  </a:lnTo>
-                  <a:lnTo>
-                    <a:pt x="1594104" y="650748"/>
-                  </a:lnTo>
-                  <a:lnTo>
-                    <a:pt x="1594104" y="0"/>
-                  </a:lnTo>
-                  <a:close/>
-                </a:path>
-              </a:pathLst>
-            </a:custGeom>
-            <a:solidFill>
-              <a:srgbClr val="2A9FBB"/>
-            </a:solidFill>
-          </p:spPr>
-          <p:txBody>
-            <a:bodyPr wrap="square" lIns="0" tIns="0" rIns="0" bIns="0" rtlCol="0"/>
-            <a:lstStyle/>
-            <a:p>
-              <a:endParaRPr/>
-            </a:p>
-          </p:txBody>
-        </p:sp>
-        <p:pic>
-          <p:nvPicPr>
-            <p:cNvPr id="16" name="object 16"/>
-            <p:cNvPicPr/>
-            <p:nvPr/>
-          </p:nvPicPr>
-          <p:blipFill>
-            <a:blip r:embed="rId8" cstate="print"/>
-            <a:stretch>
-              <a:fillRect/>
-            </a:stretch>
-          </p:blipFill>
-          <p:spPr>
-            <a:xfrm>
-              <a:off x="3068065" y="4660645"/>
-              <a:ext cx="737006" cy="274319"/>
-            </a:xfrm>
-            <a:prstGeom prst="rect">
-              <a:avLst/>
-            </a:prstGeom>
-          </p:spPr>
-        </p:pic>
-      </p:grpSp>
-      <p:sp>
-        <p:nvSpPr>
-          <p:cNvPr id="17" name="object 17"/>
-          <p:cNvSpPr/>
-          <p:nvPr/>
-        </p:nvSpPr>
-        <p:spPr>
-          <a:xfrm>
-            <a:off x="3325495" y="2788157"/>
-            <a:ext cx="114300" cy="539115"/>
-          </a:xfrm>
-          <a:custGeom>
-            <a:avLst/>
-            <a:gdLst/>
-            <a:ahLst/>
-            <a:cxnLst/>
-            <a:rect l="l" t="t" r="r" b="b"/>
-            <a:pathLst>
-              <a:path w="114300" h="539114">
-                <a:moveTo>
-                  <a:pt x="0" y="424561"/>
-                </a:moveTo>
-                <a:lnTo>
-                  <a:pt x="57022" y="538988"/>
-                </a:lnTo>
-                <a:lnTo>
-                  <a:pt x="104753" y="443738"/>
-                </a:lnTo>
-                <a:lnTo>
-                  <a:pt x="76200" y="443738"/>
-                </a:lnTo>
-                <a:lnTo>
-                  <a:pt x="38100" y="443611"/>
-                </a:lnTo>
-                <a:lnTo>
-                  <a:pt x="38110" y="424603"/>
-                </a:lnTo>
-                <a:lnTo>
-                  <a:pt x="0" y="424561"/>
-                </a:lnTo>
-                <a:close/>
-              </a:path>
-              <a:path w="114300" h="539114">
-                <a:moveTo>
-                  <a:pt x="38110" y="424603"/>
-                </a:moveTo>
-                <a:lnTo>
-                  <a:pt x="38100" y="443611"/>
-                </a:lnTo>
-                <a:lnTo>
-                  <a:pt x="76200" y="443738"/>
-                </a:lnTo>
-                <a:lnTo>
-                  <a:pt x="76210" y="424645"/>
-                </a:lnTo>
-                <a:lnTo>
-                  <a:pt x="38110" y="424603"/>
-                </a:lnTo>
-                <a:close/>
-              </a:path>
-              <a:path w="114300" h="539114">
-                <a:moveTo>
-                  <a:pt x="76210" y="424645"/>
-                </a:moveTo>
-                <a:lnTo>
-                  <a:pt x="76200" y="443738"/>
-                </a:lnTo>
-                <a:lnTo>
-                  <a:pt x="104753" y="443738"/>
-                </a:lnTo>
-                <a:lnTo>
-                  <a:pt x="114300" y="424688"/>
-                </a:lnTo>
-                <a:lnTo>
-                  <a:pt x="76210" y="424645"/>
-                </a:lnTo>
-                <a:close/>
-              </a:path>
-              <a:path w="114300" h="539114">
-                <a:moveTo>
-                  <a:pt x="76453" y="0"/>
-                </a:moveTo>
-                <a:lnTo>
-                  <a:pt x="38353" y="0"/>
-                </a:lnTo>
-                <a:lnTo>
-                  <a:pt x="38110" y="424603"/>
-                </a:lnTo>
-                <a:lnTo>
-                  <a:pt x="76210" y="424645"/>
-                </a:lnTo>
-                <a:lnTo>
-                  <a:pt x="76453" y="0"/>
-                </a:lnTo>
-                <a:close/>
-              </a:path>
-            </a:pathLst>
-          </a:custGeom>
-          <a:solidFill>
-            <a:srgbClr val="EF5A28"/>
-          </a:solidFill>
-        </p:spPr>
-        <p:txBody>
-          <a:bodyPr wrap="square" lIns="0" tIns="0" rIns="0" bIns="0" rtlCol="0"/>
-          <a:lstStyle/>
-          <a:p>
-            <a:endParaRPr/>
-          </a:p>
-        </p:txBody>
-      </p:sp>
-      <p:sp>
-        <p:nvSpPr>
-          <p:cNvPr id="18" name="object 18"/>
-          <p:cNvSpPr/>
-          <p:nvPr/>
-        </p:nvSpPr>
-        <p:spPr>
-          <a:xfrm>
-            <a:off x="3349878" y="3955541"/>
-            <a:ext cx="114300" cy="539115"/>
-          </a:xfrm>
-          <a:custGeom>
-            <a:avLst/>
-            <a:gdLst/>
-            <a:ahLst/>
-            <a:cxnLst/>
-            <a:rect l="l" t="t" r="r" b="b"/>
-            <a:pathLst>
-              <a:path w="114300" h="539114">
-                <a:moveTo>
-                  <a:pt x="0" y="424560"/>
-                </a:moveTo>
-                <a:lnTo>
-                  <a:pt x="57023" y="538987"/>
-                </a:lnTo>
-                <a:lnTo>
-                  <a:pt x="104753" y="443737"/>
-                </a:lnTo>
-                <a:lnTo>
-                  <a:pt x="76200" y="443737"/>
-                </a:lnTo>
-                <a:lnTo>
-                  <a:pt x="38100" y="443610"/>
-                </a:lnTo>
-                <a:lnTo>
-                  <a:pt x="38110" y="424603"/>
-                </a:lnTo>
-                <a:lnTo>
-                  <a:pt x="0" y="424560"/>
-                </a:lnTo>
-                <a:close/>
-              </a:path>
-              <a:path w="114300" h="539114">
-                <a:moveTo>
-                  <a:pt x="76454" y="0"/>
-                </a:moveTo>
-                <a:lnTo>
-                  <a:pt x="38354" y="0"/>
-                </a:lnTo>
-                <a:lnTo>
-                  <a:pt x="38100" y="443610"/>
-                </a:lnTo>
-                <a:lnTo>
-                  <a:pt x="76200" y="443737"/>
-                </a:lnTo>
-                <a:lnTo>
-                  <a:pt x="76454" y="0"/>
-                </a:lnTo>
-                <a:close/>
-              </a:path>
-              <a:path w="114300" h="539114">
-                <a:moveTo>
-                  <a:pt x="76210" y="424645"/>
-                </a:moveTo>
-                <a:lnTo>
-                  <a:pt x="76200" y="443737"/>
-                </a:lnTo>
-                <a:lnTo>
-                  <a:pt x="104753" y="443737"/>
-                </a:lnTo>
-                <a:lnTo>
-                  <a:pt x="114300" y="424687"/>
-                </a:lnTo>
-                <a:lnTo>
-                  <a:pt x="76210" y="424645"/>
-                </a:lnTo>
-                <a:close/>
-              </a:path>
-              <a:path w="114300" h="539114">
-                <a:moveTo>
-                  <a:pt x="76210" y="424603"/>
-                </a:moveTo>
-                <a:lnTo>
-                  <a:pt x="38110" y="424603"/>
-                </a:lnTo>
-                <a:lnTo>
-                  <a:pt x="76210" y="424645"/>
-                </a:lnTo>
-                <a:close/>
-              </a:path>
-            </a:pathLst>
-          </a:custGeom>
-          <a:solidFill>
-            <a:srgbClr val="EF5A28"/>
-          </a:solidFill>
-        </p:spPr>
-        <p:txBody>
-          <a:bodyPr wrap="square" lIns="0" tIns="0" rIns="0" bIns="0" rtlCol="0"/>
-          <a:lstStyle/>
-          <a:p>
-            <a:endParaRPr/>
-          </a:p>
-        </p:txBody>
-      </p:sp>
-      <p:sp>
-        <p:nvSpPr>
-          <p:cNvPr id="19" name="object 19"/>
-          <p:cNvSpPr/>
-          <p:nvPr/>
-        </p:nvSpPr>
-        <p:spPr>
-          <a:xfrm>
-            <a:off x="3325495" y="5145785"/>
-            <a:ext cx="114300" cy="539115"/>
-          </a:xfrm>
-          <a:custGeom>
-            <a:avLst/>
-            <a:gdLst/>
-            <a:ahLst/>
-            <a:cxnLst/>
-            <a:rect l="l" t="t" r="r" b="b"/>
-            <a:pathLst>
-              <a:path w="114300" h="539114">
-                <a:moveTo>
-                  <a:pt x="0" y="424560"/>
-                </a:moveTo>
-                <a:lnTo>
-                  <a:pt x="57022" y="538937"/>
-                </a:lnTo>
-                <a:lnTo>
-                  <a:pt x="104768" y="443699"/>
-                </a:lnTo>
-                <a:lnTo>
-                  <a:pt x="38100" y="443674"/>
-                </a:lnTo>
-                <a:lnTo>
-                  <a:pt x="38110" y="424603"/>
-                </a:lnTo>
-                <a:lnTo>
-                  <a:pt x="0" y="424560"/>
-                </a:lnTo>
-                <a:close/>
-              </a:path>
-              <a:path w="114300" h="539114">
-                <a:moveTo>
-                  <a:pt x="38110" y="424603"/>
-                </a:moveTo>
-                <a:lnTo>
-                  <a:pt x="38100" y="443674"/>
-                </a:lnTo>
-                <a:lnTo>
-                  <a:pt x="76200" y="443699"/>
-                </a:lnTo>
-                <a:lnTo>
-                  <a:pt x="76210" y="424645"/>
-                </a:lnTo>
-                <a:lnTo>
-                  <a:pt x="38110" y="424603"/>
-                </a:lnTo>
-                <a:close/>
-              </a:path>
-              <a:path w="114300" h="539114">
-                <a:moveTo>
-                  <a:pt x="76210" y="424645"/>
-                </a:moveTo>
-                <a:lnTo>
-                  <a:pt x="76200" y="443699"/>
-                </a:lnTo>
-                <a:lnTo>
-                  <a:pt x="104768" y="443699"/>
-                </a:lnTo>
-                <a:lnTo>
-                  <a:pt x="114300" y="424688"/>
-                </a:lnTo>
-                <a:lnTo>
-                  <a:pt x="76210" y="424645"/>
-                </a:lnTo>
-                <a:close/>
-              </a:path>
-              <a:path w="114300" h="539114">
-                <a:moveTo>
-                  <a:pt x="76453" y="0"/>
-                </a:moveTo>
-                <a:lnTo>
-                  <a:pt x="38353" y="0"/>
-                </a:lnTo>
-                <a:lnTo>
-                  <a:pt x="38110" y="424603"/>
-                </a:lnTo>
-                <a:lnTo>
-                  <a:pt x="76210" y="424645"/>
-                </a:lnTo>
-                <a:lnTo>
-                  <a:pt x="76453" y="0"/>
-                </a:lnTo>
-                <a:close/>
-              </a:path>
-            </a:pathLst>
-          </a:custGeom>
-          <a:solidFill>
-            <a:srgbClr val="EF5A28"/>
-          </a:solidFill>
-        </p:spPr>
-        <p:txBody>
-          <a:bodyPr wrap="square" lIns="0" tIns="0" rIns="0" bIns="0" rtlCol="0"/>
-          <a:lstStyle/>
-          <a:p>
-            <a:endParaRPr/>
-          </a:p>
-        </p:txBody>
-      </p:sp>
-      <p:sp>
-        <p:nvSpPr>
-          <p:cNvPr id="20" name="object 20"/>
-          <p:cNvSpPr/>
-          <p:nvPr/>
-        </p:nvSpPr>
-        <p:spPr>
-          <a:xfrm>
-            <a:off x="2344420" y="2316479"/>
-            <a:ext cx="247650" cy="3707765"/>
-          </a:xfrm>
-          <a:custGeom>
-            <a:avLst/>
-            <a:gdLst/>
-            <a:ahLst/>
-            <a:cxnLst/>
-            <a:rect l="l" t="t" r="r" b="b"/>
-            <a:pathLst>
-              <a:path w="247650" h="3707765">
-                <a:moveTo>
-                  <a:pt x="133350" y="38100"/>
-                </a:moveTo>
-                <a:lnTo>
-                  <a:pt x="19050" y="38100"/>
-                </a:lnTo>
-                <a:lnTo>
-                  <a:pt x="11626" y="39594"/>
-                </a:lnTo>
-                <a:lnTo>
-                  <a:pt x="5572" y="43672"/>
-                </a:lnTo>
-                <a:lnTo>
-                  <a:pt x="1494" y="49726"/>
-                </a:lnTo>
-                <a:lnTo>
-                  <a:pt x="0" y="57150"/>
-                </a:lnTo>
-                <a:lnTo>
-                  <a:pt x="0" y="3688308"/>
-                </a:lnTo>
-                <a:lnTo>
-                  <a:pt x="1494" y="3695726"/>
-                </a:lnTo>
-                <a:lnTo>
-                  <a:pt x="5572" y="3701781"/>
-                </a:lnTo>
-                <a:lnTo>
-                  <a:pt x="11626" y="3705862"/>
-                </a:lnTo>
-                <a:lnTo>
-                  <a:pt x="19050" y="3707358"/>
-                </a:lnTo>
-                <a:lnTo>
-                  <a:pt x="234950" y="3707358"/>
-                </a:lnTo>
-                <a:lnTo>
-                  <a:pt x="234950" y="3688308"/>
-                </a:lnTo>
-                <a:lnTo>
-                  <a:pt x="38100" y="3688308"/>
-                </a:lnTo>
-                <a:lnTo>
-                  <a:pt x="19050" y="3669258"/>
-                </a:lnTo>
-                <a:lnTo>
-                  <a:pt x="38100" y="3669258"/>
-                </a:lnTo>
-                <a:lnTo>
-                  <a:pt x="38100" y="76200"/>
-                </a:lnTo>
-                <a:lnTo>
-                  <a:pt x="19050" y="76200"/>
-                </a:lnTo>
-                <a:lnTo>
-                  <a:pt x="38100" y="57150"/>
-                </a:lnTo>
-                <a:lnTo>
-                  <a:pt x="133350" y="57150"/>
-                </a:lnTo>
-                <a:lnTo>
-                  <a:pt x="133350" y="38100"/>
-                </a:lnTo>
-                <a:close/>
-              </a:path>
-              <a:path w="247650" h="3707765">
-                <a:moveTo>
-                  <a:pt x="38100" y="3669258"/>
-                </a:moveTo>
-                <a:lnTo>
-                  <a:pt x="19050" y="3669258"/>
-                </a:lnTo>
-                <a:lnTo>
-                  <a:pt x="38100" y="3688308"/>
-                </a:lnTo>
-                <a:lnTo>
-                  <a:pt x="38100" y="3669258"/>
-                </a:lnTo>
-                <a:close/>
-              </a:path>
-              <a:path w="247650" h="3707765">
-                <a:moveTo>
-                  <a:pt x="234950" y="3669258"/>
-                </a:moveTo>
-                <a:lnTo>
-                  <a:pt x="38100" y="3669258"/>
-                </a:lnTo>
-                <a:lnTo>
-                  <a:pt x="38100" y="3688308"/>
-                </a:lnTo>
-                <a:lnTo>
-                  <a:pt x="234950" y="3688308"/>
-                </a:lnTo>
-                <a:lnTo>
-                  <a:pt x="234950" y="3669258"/>
-                </a:lnTo>
-                <a:close/>
-              </a:path>
-              <a:path w="247650" h="3707765">
-                <a:moveTo>
-                  <a:pt x="133350" y="0"/>
-                </a:moveTo>
-                <a:lnTo>
-                  <a:pt x="133350" y="114300"/>
-                </a:lnTo>
-                <a:lnTo>
-                  <a:pt x="209550" y="76200"/>
-                </a:lnTo>
-                <a:lnTo>
-                  <a:pt x="152400" y="76200"/>
-                </a:lnTo>
-                <a:lnTo>
-                  <a:pt x="152400" y="38100"/>
-                </a:lnTo>
-                <a:lnTo>
-                  <a:pt x="209550" y="38100"/>
-                </a:lnTo>
-                <a:lnTo>
-                  <a:pt x="133350" y="0"/>
-                </a:lnTo>
-                <a:close/>
-              </a:path>
-              <a:path w="247650" h="3707765">
-                <a:moveTo>
-                  <a:pt x="38100" y="57150"/>
-                </a:moveTo>
-                <a:lnTo>
-                  <a:pt x="19050" y="76200"/>
-                </a:lnTo>
-                <a:lnTo>
-                  <a:pt x="38100" y="76200"/>
-                </a:lnTo>
-                <a:lnTo>
-                  <a:pt x="38100" y="57150"/>
-                </a:lnTo>
-                <a:close/>
-              </a:path>
-              <a:path w="247650" h="3707765">
-                <a:moveTo>
-                  <a:pt x="133350" y="57150"/>
-                </a:moveTo>
-                <a:lnTo>
-                  <a:pt x="38100" y="57150"/>
-                </a:lnTo>
-                <a:lnTo>
-                  <a:pt x="38100" y="76200"/>
-                </a:lnTo>
-                <a:lnTo>
-                  <a:pt x="133350" y="76200"/>
-                </a:lnTo>
-                <a:lnTo>
-                  <a:pt x="133350" y="57150"/>
-                </a:lnTo>
-                <a:close/>
-              </a:path>
-              <a:path w="247650" h="3707765">
-                <a:moveTo>
-                  <a:pt x="209550" y="38100"/>
-                </a:moveTo>
-                <a:lnTo>
-                  <a:pt x="152400" y="38100"/>
-                </a:lnTo>
-                <a:lnTo>
-                  <a:pt x="152400" y="76200"/>
-                </a:lnTo>
-                <a:lnTo>
-                  <a:pt x="209550" y="76200"/>
-                </a:lnTo>
-                <a:lnTo>
-                  <a:pt x="247650" y="57150"/>
-                </a:lnTo>
-                <a:lnTo>
-                  <a:pt x="209550" y="38100"/>
-                </a:lnTo>
-                <a:close/>
-              </a:path>
-            </a:pathLst>
-          </a:custGeom>
-          <a:solidFill>
-            <a:srgbClr val="EF5A28"/>
-          </a:solidFill>
-        </p:spPr>
-        <p:txBody>
-          <a:bodyPr wrap="square" lIns="0" tIns="0" rIns="0" bIns="0" rtlCol="0"/>
-          <a:lstStyle/>
-          <a:p>
-            <a:endParaRPr/>
-          </a:p>
-        </p:txBody>
-      </p:sp>
-      <p:grpSp>
-        <p:nvGrpSpPr>
-          <p:cNvPr id="21" name="object 21"/>
-          <p:cNvGrpSpPr/>
-          <p:nvPr/>
-        </p:nvGrpSpPr>
-        <p:grpSpPr>
-          <a:xfrm>
-            <a:off x="7508747" y="4992623"/>
-            <a:ext cx="1675130" cy="692150"/>
-            <a:chOff x="7508747" y="4992623"/>
-            <a:chExt cx="1675130" cy="692150"/>
-          </a:xfrm>
-        </p:grpSpPr>
-        <p:sp>
-          <p:nvSpPr>
-            <p:cNvPr id="22" name="object 22"/>
-            <p:cNvSpPr/>
-            <p:nvPr/>
-          </p:nvSpPr>
-          <p:spPr>
-            <a:xfrm>
-              <a:off x="7508747" y="4992623"/>
-              <a:ext cx="1675130" cy="692150"/>
-            </a:xfrm>
-            <a:custGeom>
-              <a:avLst/>
-              <a:gdLst/>
-              <a:ahLst/>
-              <a:cxnLst/>
-              <a:rect l="l" t="t" r="r" b="b"/>
-              <a:pathLst>
-                <a:path w="1675129" h="692150">
-                  <a:moveTo>
-                    <a:pt x="1674876" y="0"/>
-                  </a:moveTo>
-                  <a:lnTo>
-                    <a:pt x="0" y="0"/>
-                  </a:lnTo>
-                  <a:lnTo>
-                    <a:pt x="0" y="691895"/>
-                  </a:lnTo>
-                  <a:lnTo>
-                    <a:pt x="1674876" y="691895"/>
-                  </a:lnTo>
-                  <a:lnTo>
-                    <a:pt x="1674876" y="0"/>
-                  </a:lnTo>
-                  <a:close/>
-                </a:path>
-              </a:pathLst>
-            </a:custGeom>
-            <a:solidFill>
-              <a:srgbClr val="2A9FBB"/>
-            </a:solidFill>
-          </p:spPr>
-          <p:txBody>
-            <a:bodyPr wrap="square" lIns="0" tIns="0" rIns="0" bIns="0" rtlCol="0"/>
-            <a:lstStyle/>
-            <a:p>
-              <a:endParaRPr/>
-            </a:p>
-          </p:txBody>
-        </p:sp>
-        <p:pic>
-          <p:nvPicPr>
-            <p:cNvPr id="23" name="object 23"/>
-            <p:cNvPicPr/>
-            <p:nvPr/>
-          </p:nvPicPr>
-          <p:blipFill>
-            <a:blip r:embed="rId5" cstate="print"/>
-            <a:stretch>
-              <a:fillRect/>
-            </a:stretch>
-          </p:blipFill>
-          <p:spPr>
-            <a:xfrm>
-              <a:off x="8016874" y="5202935"/>
-              <a:ext cx="792238" cy="274319"/>
-            </a:xfrm>
-            <a:prstGeom prst="rect">
-              <a:avLst/>
-            </a:prstGeom>
-          </p:spPr>
-        </p:pic>
-      </p:grpSp>
-      <p:grpSp>
-        <p:nvGrpSpPr>
-          <p:cNvPr id="24" name="object 24"/>
-          <p:cNvGrpSpPr/>
-          <p:nvPr/>
-        </p:nvGrpSpPr>
-        <p:grpSpPr>
-          <a:xfrm>
-            <a:off x="7508747" y="2430779"/>
-            <a:ext cx="1675130" cy="783590"/>
-            <a:chOff x="7508747" y="2430779"/>
-            <a:chExt cx="1675130" cy="783590"/>
-          </a:xfrm>
-        </p:grpSpPr>
-        <p:sp>
-          <p:nvSpPr>
-            <p:cNvPr id="25" name="object 25"/>
-            <p:cNvSpPr/>
-            <p:nvPr/>
-          </p:nvSpPr>
-          <p:spPr>
-            <a:xfrm>
-              <a:off x="7508747" y="2430779"/>
-              <a:ext cx="1675130" cy="783590"/>
-            </a:xfrm>
-            <a:custGeom>
-              <a:avLst/>
-              <a:gdLst/>
-              <a:ahLst/>
-              <a:cxnLst/>
-              <a:rect l="l" t="t" r="r" b="b"/>
-              <a:pathLst>
-                <a:path w="1675129" h="783589">
-                  <a:moveTo>
-                    <a:pt x="1674876" y="0"/>
-                  </a:moveTo>
-                  <a:lnTo>
-                    <a:pt x="0" y="0"/>
-                  </a:lnTo>
-                  <a:lnTo>
-                    <a:pt x="0" y="783336"/>
-                  </a:lnTo>
-                  <a:lnTo>
-                    <a:pt x="1674876" y="783336"/>
-                  </a:lnTo>
-                  <a:lnTo>
-                    <a:pt x="1674876" y="0"/>
-                  </a:lnTo>
-                  <a:close/>
-                </a:path>
-              </a:pathLst>
-            </a:custGeom>
-            <a:solidFill>
-              <a:srgbClr val="2A9FBB"/>
-            </a:solidFill>
-          </p:spPr>
-          <p:txBody>
-            <a:bodyPr wrap="square" lIns="0" tIns="0" rIns="0" bIns="0" rtlCol="0"/>
-            <a:lstStyle/>
-            <a:p>
-              <a:endParaRPr/>
-            </a:p>
-          </p:txBody>
-        </p:sp>
-        <p:pic>
-          <p:nvPicPr>
-            <p:cNvPr id="26" name="object 26"/>
-            <p:cNvPicPr/>
-            <p:nvPr/>
-          </p:nvPicPr>
-          <p:blipFill>
-            <a:blip r:embed="rId6" cstate="print"/>
-            <a:stretch>
-              <a:fillRect/>
-            </a:stretch>
-          </p:blipFill>
-          <p:spPr>
-            <a:xfrm>
-              <a:off x="7968106" y="2686176"/>
-              <a:ext cx="881887" cy="274320"/>
-            </a:xfrm>
-            <a:prstGeom prst="rect">
-              <a:avLst/>
-            </a:prstGeom>
-          </p:spPr>
-        </p:pic>
-      </p:grpSp>
-      <p:grpSp>
-        <p:nvGrpSpPr>
-          <p:cNvPr id="27" name="object 27"/>
-          <p:cNvGrpSpPr/>
-          <p:nvPr/>
-        </p:nvGrpSpPr>
-        <p:grpSpPr>
-          <a:xfrm>
-            <a:off x="9809988" y="3771900"/>
-            <a:ext cx="1675130" cy="629920"/>
-            <a:chOff x="9809988" y="3771900"/>
-            <a:chExt cx="1675130" cy="629920"/>
-          </a:xfrm>
-        </p:grpSpPr>
-        <p:sp>
-          <p:nvSpPr>
-            <p:cNvPr id="28" name="object 28"/>
-            <p:cNvSpPr/>
-            <p:nvPr/>
-          </p:nvSpPr>
-          <p:spPr>
-            <a:xfrm>
-              <a:off x="9809988" y="3771900"/>
-              <a:ext cx="1675130" cy="629920"/>
-            </a:xfrm>
-            <a:custGeom>
-              <a:avLst/>
-              <a:gdLst/>
-              <a:ahLst/>
-              <a:cxnLst/>
-              <a:rect l="l" t="t" r="r" b="b"/>
-              <a:pathLst>
-                <a:path w="1675129" h="629920">
-                  <a:moveTo>
-                    <a:pt x="1674876" y="0"/>
-                  </a:moveTo>
-                  <a:lnTo>
-                    <a:pt x="0" y="0"/>
-                  </a:lnTo>
-                  <a:lnTo>
-                    <a:pt x="0" y="629412"/>
-                  </a:lnTo>
-                  <a:lnTo>
-                    <a:pt x="1674876" y="629412"/>
-                  </a:lnTo>
-                  <a:lnTo>
-                    <a:pt x="1674876" y="0"/>
-                  </a:lnTo>
-                  <a:close/>
-                </a:path>
-              </a:pathLst>
-            </a:custGeom>
-            <a:solidFill>
-              <a:srgbClr val="2A9FBB"/>
-            </a:solidFill>
-          </p:spPr>
-          <p:txBody>
-            <a:bodyPr wrap="square" lIns="0" tIns="0" rIns="0" bIns="0" rtlCol="0"/>
-            <a:lstStyle/>
-            <a:p>
-              <a:endParaRPr/>
-            </a:p>
-          </p:txBody>
-        </p:sp>
-        <p:pic>
-          <p:nvPicPr>
-            <p:cNvPr id="29" name="object 29"/>
-            <p:cNvPicPr/>
-            <p:nvPr/>
-          </p:nvPicPr>
-          <p:blipFill>
-            <a:blip r:embed="rId9" cstate="print"/>
-            <a:stretch>
-              <a:fillRect/>
-            </a:stretch>
-          </p:blipFill>
-          <p:spPr>
-            <a:xfrm>
-              <a:off x="10113010" y="3951096"/>
-              <a:ext cx="1205293" cy="274319"/>
-            </a:xfrm>
-            <a:prstGeom prst="rect">
-              <a:avLst/>
-            </a:prstGeom>
-          </p:spPr>
-        </p:pic>
-      </p:grpSp>
-      <p:grpSp>
-        <p:nvGrpSpPr>
-          <p:cNvPr id="30" name="object 30"/>
-          <p:cNvGrpSpPr/>
-          <p:nvPr/>
-        </p:nvGrpSpPr>
-        <p:grpSpPr>
-          <a:xfrm>
-            <a:off x="7261859" y="2766060"/>
-            <a:ext cx="2548890" cy="2592705"/>
-            <a:chOff x="7261859" y="2766060"/>
-            <a:chExt cx="2548890" cy="2592705"/>
-          </a:xfrm>
-        </p:grpSpPr>
-        <p:sp>
-          <p:nvSpPr>
-            <p:cNvPr id="31" name="object 31"/>
-            <p:cNvSpPr/>
-            <p:nvPr/>
-          </p:nvSpPr>
-          <p:spPr>
-            <a:xfrm>
-              <a:off x="7508747" y="3771900"/>
-              <a:ext cx="1675130" cy="652780"/>
-            </a:xfrm>
-            <a:custGeom>
-              <a:avLst/>
-              <a:gdLst/>
-              <a:ahLst/>
-              <a:cxnLst/>
-              <a:rect l="l" t="t" r="r" b="b"/>
-              <a:pathLst>
-                <a:path w="1675129" h="652779">
-                  <a:moveTo>
-                    <a:pt x="1674876" y="0"/>
-                  </a:moveTo>
-                  <a:lnTo>
-                    <a:pt x="0" y="0"/>
-                  </a:lnTo>
-                  <a:lnTo>
-                    <a:pt x="0" y="652272"/>
-                  </a:lnTo>
-                  <a:lnTo>
-                    <a:pt x="1674876" y="652272"/>
-                  </a:lnTo>
-                  <a:lnTo>
-                    <a:pt x="1674876" y="0"/>
-                  </a:lnTo>
-                  <a:close/>
-                </a:path>
-              </a:pathLst>
-            </a:custGeom>
-            <a:solidFill>
-              <a:srgbClr val="2A9FBB"/>
-            </a:solidFill>
-          </p:spPr>
-          <p:txBody>
-            <a:bodyPr wrap="square" lIns="0" tIns="0" rIns="0" bIns="0" rtlCol="0"/>
-            <a:lstStyle/>
-            <a:p>
-              <a:endParaRPr/>
-            </a:p>
-          </p:txBody>
-        </p:sp>
-        <p:pic>
-          <p:nvPicPr>
-            <p:cNvPr id="32" name="object 32"/>
-            <p:cNvPicPr/>
-            <p:nvPr/>
-          </p:nvPicPr>
-          <p:blipFill>
-            <a:blip r:embed="rId8" cstate="print"/>
-            <a:stretch>
-              <a:fillRect/>
-            </a:stretch>
-          </p:blipFill>
-          <p:spPr>
-            <a:xfrm>
-              <a:off x="8039734" y="3962146"/>
-              <a:ext cx="737374" cy="274319"/>
-            </a:xfrm>
-            <a:prstGeom prst="rect">
-              <a:avLst/>
-            </a:prstGeom>
-          </p:spPr>
-        </p:pic>
-        <p:sp>
-          <p:nvSpPr>
-            <p:cNvPr id="33" name="object 33"/>
-            <p:cNvSpPr/>
-            <p:nvPr/>
-          </p:nvSpPr>
-          <p:spPr>
-            <a:xfrm>
-              <a:off x="7261860" y="2766059"/>
-              <a:ext cx="2548890" cy="2592705"/>
-            </a:xfrm>
-            <a:custGeom>
-              <a:avLst/>
-              <a:gdLst/>
-              <a:ahLst/>
-              <a:cxnLst/>
-              <a:rect l="l" t="t" r="r" b="b"/>
-              <a:pathLst>
-                <a:path w="2548890" h="2592704">
-                  <a:moveTo>
-                    <a:pt x="247650" y="57150"/>
-                  </a:moveTo>
-                  <a:lnTo>
-                    <a:pt x="209550" y="38100"/>
-                  </a:lnTo>
-                  <a:lnTo>
-                    <a:pt x="133350" y="0"/>
-                  </a:lnTo>
-                  <a:lnTo>
-                    <a:pt x="133350" y="38100"/>
-                  </a:lnTo>
-                  <a:lnTo>
-                    <a:pt x="19050" y="38100"/>
-                  </a:lnTo>
-                  <a:lnTo>
-                    <a:pt x="11620" y="39598"/>
-                  </a:lnTo>
-                  <a:lnTo>
-                    <a:pt x="5562" y="43675"/>
-                  </a:lnTo>
-                  <a:lnTo>
-                    <a:pt x="1485" y="49733"/>
-                  </a:lnTo>
-                  <a:lnTo>
-                    <a:pt x="0" y="57150"/>
-                  </a:lnTo>
-                  <a:lnTo>
-                    <a:pt x="0" y="2573147"/>
-                  </a:lnTo>
-                  <a:lnTo>
-                    <a:pt x="1485" y="2580576"/>
-                  </a:lnTo>
-                  <a:lnTo>
-                    <a:pt x="5562" y="2586634"/>
-                  </a:lnTo>
-                  <a:lnTo>
-                    <a:pt x="11620" y="2590711"/>
-                  </a:lnTo>
-                  <a:lnTo>
-                    <a:pt x="19050" y="2592197"/>
-                  </a:lnTo>
-                  <a:lnTo>
-                    <a:pt x="247650" y="2592197"/>
-                  </a:lnTo>
-                  <a:lnTo>
-                    <a:pt x="247650" y="2573147"/>
-                  </a:lnTo>
-                  <a:lnTo>
-                    <a:pt x="247650" y="2554097"/>
-                  </a:lnTo>
-                  <a:lnTo>
-                    <a:pt x="38100" y="2554097"/>
-                  </a:lnTo>
-                  <a:lnTo>
-                    <a:pt x="38100" y="76200"/>
-                  </a:lnTo>
-                  <a:lnTo>
-                    <a:pt x="133350" y="76200"/>
-                  </a:lnTo>
-                  <a:lnTo>
-                    <a:pt x="133350" y="114300"/>
-                  </a:lnTo>
-                  <a:lnTo>
-                    <a:pt x="209550" y="76200"/>
-                  </a:lnTo>
-                  <a:lnTo>
-                    <a:pt x="247650" y="57150"/>
-                  </a:lnTo>
-                  <a:close/>
-                </a:path>
-                <a:path w="2548890" h="2592704">
-                  <a:moveTo>
-                    <a:pt x="1140079" y="2098802"/>
-                  </a:moveTo>
-                  <a:lnTo>
-                    <a:pt x="1101979" y="2098763"/>
-                  </a:lnTo>
-                  <a:lnTo>
-                    <a:pt x="1102233" y="1674114"/>
-                  </a:lnTo>
-                  <a:lnTo>
-                    <a:pt x="1064133" y="1674114"/>
-                  </a:lnTo>
-                  <a:lnTo>
-                    <a:pt x="1063879" y="2098725"/>
-                  </a:lnTo>
-                  <a:lnTo>
-                    <a:pt x="1025779" y="2098675"/>
-                  </a:lnTo>
-                  <a:lnTo>
-                    <a:pt x="1082802" y="2213102"/>
-                  </a:lnTo>
-                  <a:lnTo>
-                    <a:pt x="1130528" y="2117852"/>
-                  </a:lnTo>
-                  <a:lnTo>
-                    <a:pt x="1140079" y="2098802"/>
-                  </a:lnTo>
-                  <a:close/>
-                </a:path>
-                <a:path w="2548890" h="2592704">
-                  <a:moveTo>
-                    <a:pt x="1140079" y="862838"/>
-                  </a:moveTo>
-                  <a:lnTo>
-                    <a:pt x="1101979" y="862799"/>
-                  </a:lnTo>
-                  <a:lnTo>
-                    <a:pt x="1102233" y="438150"/>
-                  </a:lnTo>
-                  <a:lnTo>
-                    <a:pt x="1064133" y="438150"/>
-                  </a:lnTo>
-                  <a:lnTo>
-                    <a:pt x="1063879" y="862761"/>
-                  </a:lnTo>
-                  <a:lnTo>
-                    <a:pt x="1025779" y="862711"/>
-                  </a:lnTo>
-                  <a:lnTo>
-                    <a:pt x="1082802" y="977138"/>
-                  </a:lnTo>
-                  <a:lnTo>
-                    <a:pt x="1130528" y="881888"/>
-                  </a:lnTo>
-                  <a:lnTo>
-                    <a:pt x="1140079" y="862838"/>
-                  </a:lnTo>
-                  <a:close/>
-                </a:path>
-                <a:path w="2548890" h="2592704">
-                  <a:moveTo>
-                    <a:pt x="2548636" y="1465326"/>
-                  </a:moveTo>
-                  <a:lnTo>
-                    <a:pt x="2519680" y="1450848"/>
-                  </a:lnTo>
-                  <a:lnTo>
-                    <a:pt x="2461768" y="1421892"/>
-                  </a:lnTo>
-                  <a:lnTo>
-                    <a:pt x="2461768" y="1450848"/>
-                  </a:lnTo>
-                  <a:lnTo>
-                    <a:pt x="1922526" y="1450848"/>
-                  </a:lnTo>
-                  <a:lnTo>
-                    <a:pt x="1922526" y="1479804"/>
-                  </a:lnTo>
-                  <a:lnTo>
-                    <a:pt x="2461768" y="1479804"/>
-                  </a:lnTo>
-                  <a:lnTo>
-                    <a:pt x="2461768" y="1508760"/>
-                  </a:lnTo>
-                  <a:lnTo>
-                    <a:pt x="2519680" y="1479804"/>
-                  </a:lnTo>
-                  <a:lnTo>
-                    <a:pt x="2548636" y="1465326"/>
-                  </a:lnTo>
-                  <a:close/>
-                </a:path>
-                <a:path w="2548890" h="2592704">
-                  <a:moveTo>
-                    <a:pt x="2548636" y="1223772"/>
-                  </a:moveTo>
-                  <a:lnTo>
-                    <a:pt x="2009394" y="1223772"/>
-                  </a:lnTo>
-                  <a:lnTo>
-                    <a:pt x="2009394" y="1194816"/>
-                  </a:lnTo>
-                  <a:lnTo>
-                    <a:pt x="1922526" y="1238250"/>
-                  </a:lnTo>
-                  <a:lnTo>
-                    <a:pt x="2009394" y="1281684"/>
-                  </a:lnTo>
-                  <a:lnTo>
-                    <a:pt x="2009394" y="1252728"/>
-                  </a:lnTo>
-                  <a:lnTo>
-                    <a:pt x="2548636" y="1252728"/>
-                  </a:lnTo>
-                  <a:lnTo>
-                    <a:pt x="2548636" y="1223772"/>
-                  </a:lnTo>
-                  <a:close/>
-                </a:path>
-              </a:pathLst>
-            </a:custGeom>
-            <a:solidFill>
-              <a:srgbClr val="EF5A28"/>
-            </a:solidFill>
-          </p:spPr>
-          <p:txBody>
-            <a:bodyPr wrap="square" lIns="0" tIns="0" rIns="0" bIns="0" rtlCol="0"/>
-            <a:lstStyle/>
-            <a:p>
-              <a:endParaRPr/>
-            </a:p>
-          </p:txBody>
-        </p:sp>
-      </p:grpSp>
-      <p:sp>
-        <p:nvSpPr>
-          <p:cNvPr id="34" name="Slide Number Placeholder 33"/>
-          <p:cNvSpPr>
-            <a:spLocks noGrp="1"/>
-          </p:cNvSpPr>
-          <p:nvPr>
-            <p:ph type="sldNum" sz="quarter" idx="7"/>
-          </p:nvPr>
-        </p:nvSpPr>
-        <p:spPr/>
-        <p:txBody>
-          <a:bodyPr/>
-          <a:lstStyle/>
-          <a:p>
-            <a:fld id="{B6F15528-21DE-4FAA-801E-634DDDAF4B2B}" type="slidenum">
-              <a:rPr/>
-              <a:t>23</a:t>
-            </a:fld>
-            <a:endParaRPr/>
-          </a:p>
-        </p:txBody>
-      </p:sp>
-    </p:spTree>
-  </p:cSld>
-  <p:clrMapOvr>
-    <a:masterClrMapping/>
-  </p:clrMapOvr>
-</p:sld>
-</file>
-
-<file path=ppt/slides/slide24.xml><?xml version="1.0" encoding="utf-8"?>
-<p:sld xmlns:a="http://schemas.openxmlformats.org/drawingml/2006/main" xmlns:r="http://schemas.openxmlformats.org/officeDocument/2006/relationships" xmlns:p="http://schemas.openxmlformats.org/presentationml/2006/main">
-  <p:cSld>
-    <p:spTree>
-      <p:nvGrpSpPr>
-        <p:cNvPr id="1" name=""/>
-        <p:cNvGrpSpPr/>
-        <p:nvPr/>
-      </p:nvGrpSpPr>
-      <p:grpSpPr>
-        <a:xfrm>
-          <a:off x="0" y="0"/>
-          <a:ext cx="0" cy="0"/>
-          <a:chOff x="0" y="0"/>
-          <a:chExt cx="0" cy="0"/>
-        </a:xfrm>
-      </p:grpSpPr>
-      <p:sp>
-        <p:nvSpPr>
-          <p:cNvPr id="2" name="object 2"/>
-          <p:cNvSpPr/>
-          <p:nvPr/>
-        </p:nvSpPr>
-        <p:spPr>
-          <a:xfrm>
-            <a:off x="6096761" y="1762505"/>
-            <a:ext cx="0" cy="4645660"/>
-          </a:xfrm>
-          <a:custGeom>
-            <a:avLst/>
-            <a:gdLst/>
-            <a:ahLst/>
-            <a:cxnLst/>
-            <a:rect l="l" t="t" r="r" b="b"/>
-            <a:pathLst>
-              <a:path h="4645660">
-                <a:moveTo>
-                  <a:pt x="0" y="0"/>
-                </a:moveTo>
-                <a:lnTo>
-                  <a:pt x="0" y="4645482"/>
-                </a:lnTo>
-              </a:path>
-            </a:pathLst>
-          </a:custGeom>
-          <a:ln w="25908">
-            <a:solidFill>
-              <a:srgbClr val="EF5A28"/>
-            </a:solidFill>
-          </a:ln>
-        </p:spPr>
-        <p:txBody>
-          <a:bodyPr wrap="square" lIns="0" tIns="0" rIns="0" bIns="0" rtlCol="0"/>
-          <a:lstStyle/>
-          <a:p>
-            <a:endParaRPr/>
-          </a:p>
-        </p:txBody>
-      </p:sp>
-      <p:pic>
-        <p:nvPicPr>
-          <p:cNvPr id="3" name="object 3"/>
-          <p:cNvPicPr/>
-          <p:nvPr/>
-        </p:nvPicPr>
-        <p:blipFill>
-          <a:blip r:embed="rId2" cstate="print"/>
-          <a:stretch>
-            <a:fillRect/>
-          </a:stretch>
-        </p:blipFill>
-        <p:spPr>
-          <a:xfrm>
-            <a:off x="5205984" y="1762632"/>
-            <a:ext cx="815339" cy="365760"/>
-          </a:xfrm>
-          <a:prstGeom prst="rect">
-            <a:avLst/>
-          </a:prstGeom>
-        </p:spPr>
-      </p:pic>
-      <p:pic>
-        <p:nvPicPr>
-          <p:cNvPr id="4" name="object 4"/>
-          <p:cNvPicPr/>
-          <p:nvPr/>
-        </p:nvPicPr>
-        <p:blipFill>
-          <a:blip r:embed="rId3" cstate="print"/>
-          <a:stretch>
-            <a:fillRect/>
-          </a:stretch>
-        </p:blipFill>
-        <p:spPr>
-          <a:xfrm>
-            <a:off x="1049426" y="2399029"/>
-            <a:ext cx="4938776" cy="304800"/>
-          </a:xfrm>
-          <a:prstGeom prst="rect">
-            <a:avLst/>
-          </a:prstGeom>
-        </p:spPr>
-      </p:pic>
-      <p:pic>
-        <p:nvPicPr>
-          <p:cNvPr id="5" name="object 5"/>
-          <p:cNvPicPr/>
-          <p:nvPr/>
-        </p:nvPicPr>
-        <p:blipFill>
-          <a:blip r:embed="rId4" cstate="print"/>
-          <a:stretch>
-            <a:fillRect/>
-          </a:stretch>
-        </p:blipFill>
-        <p:spPr>
-          <a:xfrm>
-            <a:off x="6391655" y="1762632"/>
-            <a:ext cx="1167142" cy="365760"/>
-          </a:xfrm>
-          <a:prstGeom prst="rect">
-            <a:avLst/>
-          </a:prstGeom>
-        </p:spPr>
-      </p:pic>
-      <p:pic>
-        <p:nvPicPr>
-          <p:cNvPr id="6" name="object 6"/>
-          <p:cNvPicPr/>
-          <p:nvPr/>
-        </p:nvPicPr>
-        <p:blipFill>
-          <a:blip r:embed="rId5" cstate="print"/>
-          <a:stretch>
-            <a:fillRect/>
-          </a:stretch>
-        </p:blipFill>
-        <p:spPr>
-          <a:xfrm>
-            <a:off x="6333744" y="2399029"/>
-            <a:ext cx="4737734" cy="304800"/>
-          </a:xfrm>
-          <a:prstGeom prst="rect">
-            <a:avLst/>
-          </a:prstGeom>
-        </p:spPr>
-      </p:pic>
-      <p:sp>
-        <p:nvSpPr>
-          <p:cNvPr id="7" name="Slide Number Placeholder 6"/>
-          <p:cNvSpPr>
-            <a:spLocks noGrp="1"/>
-          </p:cNvSpPr>
-          <p:nvPr>
-            <p:ph type="sldNum" sz="quarter" idx="7"/>
-          </p:nvPr>
-        </p:nvSpPr>
-        <p:spPr/>
-        <p:txBody>
-          <a:bodyPr/>
-          <a:lstStyle/>
-          <a:p>
-            <a:fld id="{B6F15528-21DE-4FAA-801E-634DDDAF4B2B}" type="slidenum">
-              <a:rPr/>
-              <a:t>24</a:t>
-            </a:fld>
-            <a:endParaRPr/>
-          </a:p>
-        </p:txBody>
-      </p:sp>
-    </p:spTree>
-  </p:cSld>
-  <p:clrMapOvr>
-    <a:masterClrMapping/>
-  </p:clrMapOvr>
-</p:sld>
-</file>
-
-<file path=ppt/slides/slide25.xml><?xml version="1.0" encoding="utf-8"?>
-<p:sld xmlns:a="http://schemas.openxmlformats.org/drawingml/2006/main" xmlns:r="http://schemas.openxmlformats.org/officeDocument/2006/relationships" xmlns:p="http://schemas.openxmlformats.org/presentationml/2006/main">
-  <p:cSld>
-    <p:spTree>
-      <p:nvGrpSpPr>
-        <p:cNvPr id="1" name=""/>
-        <p:cNvGrpSpPr/>
-        <p:nvPr/>
-      </p:nvGrpSpPr>
-      <p:grpSpPr>
-        <a:xfrm>
-          <a:off x="0" y="0"/>
-          <a:ext cx="0" cy="0"/>
-          <a:chOff x="0" y="0"/>
-          <a:chExt cx="0" cy="0"/>
-        </a:xfrm>
-      </p:grpSpPr>
-      <p:sp>
-        <p:nvSpPr>
-          <p:cNvPr id="2" name="object 2"/>
-          <p:cNvSpPr/>
-          <p:nvPr/>
-        </p:nvSpPr>
-        <p:spPr>
-          <a:xfrm>
-            <a:off x="6096761" y="1762505"/>
-            <a:ext cx="0" cy="4645660"/>
-          </a:xfrm>
-          <a:custGeom>
-            <a:avLst/>
-            <a:gdLst/>
-            <a:ahLst/>
-            <a:cxnLst/>
-            <a:rect l="l" t="t" r="r" b="b"/>
-            <a:pathLst>
-              <a:path h="4645660">
-                <a:moveTo>
-                  <a:pt x="0" y="0"/>
-                </a:moveTo>
-                <a:lnTo>
-                  <a:pt x="0" y="4645482"/>
-                </a:lnTo>
-              </a:path>
-            </a:pathLst>
-          </a:custGeom>
-          <a:ln w="25908">
-            <a:solidFill>
-              <a:srgbClr val="EF5A28"/>
-            </a:solidFill>
-          </a:ln>
-        </p:spPr>
-        <p:txBody>
-          <a:bodyPr wrap="square" lIns="0" tIns="0" rIns="0" bIns="0" rtlCol="0"/>
-          <a:lstStyle/>
-          <a:p>
-            <a:endParaRPr/>
-          </a:p>
-        </p:txBody>
-      </p:sp>
-      <p:pic>
-        <p:nvPicPr>
-          <p:cNvPr id="3" name="object 3"/>
-          <p:cNvPicPr/>
-          <p:nvPr/>
-        </p:nvPicPr>
-        <p:blipFill>
-          <a:blip r:embed="rId2" cstate="print"/>
-          <a:stretch>
-            <a:fillRect/>
-          </a:stretch>
-        </p:blipFill>
-        <p:spPr>
-          <a:xfrm>
-            <a:off x="5205984" y="1762632"/>
-            <a:ext cx="815339" cy="365760"/>
-          </a:xfrm>
-          <a:prstGeom prst="rect">
-            <a:avLst/>
-          </a:prstGeom>
-        </p:spPr>
-      </p:pic>
-      <p:pic>
-        <p:nvPicPr>
-          <p:cNvPr id="4" name="object 4"/>
-          <p:cNvPicPr/>
-          <p:nvPr/>
-        </p:nvPicPr>
-        <p:blipFill>
-          <a:blip r:embed="rId3" cstate="print"/>
-          <a:stretch>
-            <a:fillRect/>
-          </a:stretch>
-        </p:blipFill>
-        <p:spPr>
-          <a:xfrm>
-            <a:off x="1049426" y="2399029"/>
-            <a:ext cx="4938776" cy="304800"/>
-          </a:xfrm>
-          <a:prstGeom prst="rect">
-            <a:avLst/>
-          </a:prstGeom>
-        </p:spPr>
-      </p:pic>
-      <p:pic>
-        <p:nvPicPr>
-          <p:cNvPr id="5" name="object 5"/>
-          <p:cNvPicPr/>
-          <p:nvPr/>
-        </p:nvPicPr>
-        <p:blipFill>
-          <a:blip r:embed="rId4" cstate="print"/>
-          <a:stretch>
-            <a:fillRect/>
-          </a:stretch>
-        </p:blipFill>
-        <p:spPr>
-          <a:xfrm>
-            <a:off x="3980688" y="2901645"/>
-            <a:ext cx="2002789" cy="305104"/>
-          </a:xfrm>
-          <a:prstGeom prst="rect">
-            <a:avLst/>
-          </a:prstGeom>
-        </p:spPr>
-      </p:pic>
-      <p:pic>
-        <p:nvPicPr>
-          <p:cNvPr id="6" name="object 6"/>
-          <p:cNvPicPr/>
-          <p:nvPr/>
-        </p:nvPicPr>
-        <p:blipFill>
-          <a:blip r:embed="rId5" cstate="print"/>
-          <a:stretch>
-            <a:fillRect/>
-          </a:stretch>
-        </p:blipFill>
-        <p:spPr>
-          <a:xfrm>
-            <a:off x="6391655" y="1762632"/>
-            <a:ext cx="1167142" cy="365760"/>
-          </a:xfrm>
-          <a:prstGeom prst="rect">
-            <a:avLst/>
-          </a:prstGeom>
-        </p:spPr>
-      </p:pic>
-      <p:pic>
-        <p:nvPicPr>
-          <p:cNvPr id="7" name="object 7"/>
-          <p:cNvPicPr/>
-          <p:nvPr/>
-        </p:nvPicPr>
-        <p:blipFill>
-          <a:blip r:embed="rId6" cstate="print"/>
-          <a:stretch>
-            <a:fillRect/>
-          </a:stretch>
-        </p:blipFill>
-        <p:spPr>
-          <a:xfrm>
-            <a:off x="6333744" y="2399029"/>
-            <a:ext cx="4737734" cy="304800"/>
-          </a:xfrm>
-          <a:prstGeom prst="rect">
-            <a:avLst/>
-          </a:prstGeom>
-        </p:spPr>
-      </p:pic>
-      <p:pic>
-        <p:nvPicPr>
-          <p:cNvPr id="8" name="object 8"/>
-          <p:cNvPicPr/>
-          <p:nvPr/>
-        </p:nvPicPr>
-        <p:blipFill>
-          <a:blip r:embed="rId7" cstate="print"/>
-          <a:stretch>
-            <a:fillRect/>
-          </a:stretch>
-        </p:blipFill>
-        <p:spPr>
-          <a:xfrm>
-            <a:off x="6333744" y="2901645"/>
-            <a:ext cx="1390523" cy="305104"/>
-          </a:xfrm>
-          <a:prstGeom prst="rect">
-            <a:avLst/>
-          </a:prstGeom>
-        </p:spPr>
-      </p:pic>
-      <p:sp>
-        <p:nvSpPr>
-          <p:cNvPr id="9" name="Slide Number Placeholder 8"/>
-          <p:cNvSpPr>
-            <a:spLocks noGrp="1"/>
-          </p:cNvSpPr>
-          <p:nvPr>
-            <p:ph type="sldNum" sz="quarter" idx="7"/>
-          </p:nvPr>
-        </p:nvSpPr>
-        <p:spPr/>
-        <p:txBody>
-          <a:bodyPr/>
-          <a:lstStyle/>
-          <a:p>
-            <a:fld id="{B6F15528-21DE-4FAA-801E-634DDDAF4B2B}" type="slidenum">
-              <a:rPr/>
-              <a:t>25</a:t>
-            </a:fld>
-            <a:endParaRPr/>
-          </a:p>
-        </p:txBody>
-      </p:sp>
-    </p:spTree>
-  </p:cSld>
-  <p:clrMapOvr>
-    <a:masterClrMapping/>
-  </p:clrMapOvr>
-</p:sld>
-</file>
-
-<file path=ppt/slides/slide26.xml><?xml version="1.0" encoding="utf-8"?>
-<p:sld xmlns:a="http://schemas.openxmlformats.org/drawingml/2006/main" xmlns:r="http://schemas.openxmlformats.org/officeDocument/2006/relationships" xmlns:p="http://schemas.openxmlformats.org/presentationml/2006/main">
-  <p:cSld>
-    <p:spTree>
-      <p:nvGrpSpPr>
-        <p:cNvPr id="1" name=""/>
-        <p:cNvGrpSpPr/>
-        <p:nvPr/>
-      </p:nvGrpSpPr>
-      <p:grpSpPr>
-        <a:xfrm>
-          <a:off x="0" y="0"/>
-          <a:ext cx="0" cy="0"/>
-          <a:chOff x="0" y="0"/>
-          <a:chExt cx="0" cy="0"/>
-        </a:xfrm>
-      </p:grpSpPr>
-      <p:sp>
-        <p:nvSpPr>
-          <p:cNvPr id="2" name="object 2"/>
-          <p:cNvSpPr/>
-          <p:nvPr/>
-        </p:nvSpPr>
-        <p:spPr>
-          <a:xfrm>
-            <a:off x="6096761" y="1762505"/>
-            <a:ext cx="0" cy="4645660"/>
-          </a:xfrm>
-          <a:custGeom>
-            <a:avLst/>
-            <a:gdLst/>
-            <a:ahLst/>
-            <a:cxnLst/>
-            <a:rect l="l" t="t" r="r" b="b"/>
-            <a:pathLst>
-              <a:path h="4645660">
-                <a:moveTo>
-                  <a:pt x="0" y="0"/>
-                </a:moveTo>
-                <a:lnTo>
-                  <a:pt x="0" y="4645482"/>
-                </a:lnTo>
-              </a:path>
-            </a:pathLst>
-          </a:custGeom>
-          <a:ln w="25908">
-            <a:solidFill>
-              <a:srgbClr val="EF5A28"/>
-            </a:solidFill>
-          </a:ln>
-        </p:spPr>
-        <p:txBody>
-          <a:bodyPr wrap="square" lIns="0" tIns="0" rIns="0" bIns="0" rtlCol="0"/>
-          <a:lstStyle/>
-          <a:p>
-            <a:endParaRPr/>
-          </a:p>
-        </p:txBody>
-      </p:sp>
-      <p:pic>
-        <p:nvPicPr>
-          <p:cNvPr id="3" name="object 3"/>
-          <p:cNvPicPr/>
-          <p:nvPr/>
-        </p:nvPicPr>
-        <p:blipFill>
-          <a:blip r:embed="rId2" cstate="print"/>
-          <a:stretch>
-            <a:fillRect/>
-          </a:stretch>
-        </p:blipFill>
-        <p:spPr>
-          <a:xfrm>
-            <a:off x="5205984" y="1762632"/>
-            <a:ext cx="815339" cy="365760"/>
-          </a:xfrm>
-          <a:prstGeom prst="rect">
-            <a:avLst/>
-          </a:prstGeom>
-        </p:spPr>
-      </p:pic>
-      <p:pic>
-        <p:nvPicPr>
-          <p:cNvPr id="4" name="object 4"/>
-          <p:cNvPicPr/>
-          <p:nvPr/>
-        </p:nvPicPr>
-        <p:blipFill>
-          <a:blip r:embed="rId3" cstate="print"/>
-          <a:stretch>
-            <a:fillRect/>
-          </a:stretch>
-        </p:blipFill>
-        <p:spPr>
-          <a:xfrm>
-            <a:off x="1049426" y="2399029"/>
-            <a:ext cx="4938776" cy="304800"/>
-          </a:xfrm>
-          <a:prstGeom prst="rect">
-            <a:avLst/>
-          </a:prstGeom>
-        </p:spPr>
-      </p:pic>
-      <p:pic>
-        <p:nvPicPr>
-          <p:cNvPr id="5" name="object 5"/>
-          <p:cNvPicPr/>
-          <p:nvPr/>
-        </p:nvPicPr>
-        <p:blipFill>
-          <a:blip r:embed="rId4" cstate="print"/>
-          <a:stretch>
-            <a:fillRect/>
-          </a:stretch>
-        </p:blipFill>
-        <p:spPr>
-          <a:xfrm>
-            <a:off x="3980688" y="2901645"/>
-            <a:ext cx="2002789" cy="305104"/>
-          </a:xfrm>
-          <a:prstGeom prst="rect">
-            <a:avLst/>
-          </a:prstGeom>
-        </p:spPr>
-      </p:pic>
-      <p:pic>
-        <p:nvPicPr>
-          <p:cNvPr id="6" name="object 6"/>
-          <p:cNvPicPr/>
-          <p:nvPr/>
-        </p:nvPicPr>
-        <p:blipFill>
-          <a:blip r:embed="rId5" cstate="print"/>
-          <a:stretch>
-            <a:fillRect/>
-          </a:stretch>
-        </p:blipFill>
-        <p:spPr>
-          <a:xfrm>
-            <a:off x="2169922" y="3405251"/>
-            <a:ext cx="3820160" cy="304800"/>
-          </a:xfrm>
-          <a:prstGeom prst="rect">
-            <a:avLst/>
-          </a:prstGeom>
-        </p:spPr>
-      </p:pic>
-      <p:pic>
-        <p:nvPicPr>
-          <p:cNvPr id="7" name="object 7"/>
-          <p:cNvPicPr/>
-          <p:nvPr/>
-        </p:nvPicPr>
-        <p:blipFill>
-          <a:blip r:embed="rId6" cstate="print"/>
-          <a:stretch>
-            <a:fillRect/>
-          </a:stretch>
-        </p:blipFill>
-        <p:spPr>
-          <a:xfrm>
-            <a:off x="6391655" y="1762632"/>
-            <a:ext cx="1167142" cy="365760"/>
-          </a:xfrm>
-          <a:prstGeom prst="rect">
-            <a:avLst/>
-          </a:prstGeom>
-        </p:spPr>
-      </p:pic>
-      <p:pic>
-        <p:nvPicPr>
-          <p:cNvPr id="8" name="object 8"/>
-          <p:cNvPicPr/>
-          <p:nvPr/>
-        </p:nvPicPr>
-        <p:blipFill>
-          <a:blip r:embed="rId7" cstate="print"/>
-          <a:stretch>
-            <a:fillRect/>
-          </a:stretch>
-        </p:blipFill>
-        <p:spPr>
-          <a:xfrm>
-            <a:off x="6333744" y="2399029"/>
-            <a:ext cx="4737734" cy="304800"/>
-          </a:xfrm>
-          <a:prstGeom prst="rect">
-            <a:avLst/>
-          </a:prstGeom>
-        </p:spPr>
-      </p:pic>
-      <p:pic>
-        <p:nvPicPr>
-          <p:cNvPr id="9" name="object 9"/>
-          <p:cNvPicPr/>
-          <p:nvPr/>
-        </p:nvPicPr>
-        <p:blipFill>
-          <a:blip r:embed="rId8" cstate="print"/>
-          <a:stretch>
-            <a:fillRect/>
-          </a:stretch>
-        </p:blipFill>
-        <p:spPr>
-          <a:xfrm>
-            <a:off x="6333744" y="2901645"/>
-            <a:ext cx="1390523" cy="305104"/>
-          </a:xfrm>
-          <a:prstGeom prst="rect">
-            <a:avLst/>
-          </a:prstGeom>
-        </p:spPr>
-      </p:pic>
-      <p:pic>
-        <p:nvPicPr>
-          <p:cNvPr id="10" name="object 10"/>
-          <p:cNvPicPr/>
-          <p:nvPr/>
-        </p:nvPicPr>
-        <p:blipFill>
-          <a:blip r:embed="rId9" cstate="print"/>
-          <a:stretch>
-            <a:fillRect/>
-          </a:stretch>
-        </p:blipFill>
-        <p:spPr>
-          <a:xfrm>
-            <a:off x="6333744" y="3405251"/>
-            <a:ext cx="5005578" cy="304800"/>
-          </a:xfrm>
-          <a:prstGeom prst="rect">
-            <a:avLst/>
-          </a:prstGeom>
-        </p:spPr>
-      </p:pic>
-      <p:sp>
-        <p:nvSpPr>
-          <p:cNvPr id="11" name="Slide Number Placeholder 10"/>
-          <p:cNvSpPr>
-            <a:spLocks noGrp="1"/>
-          </p:cNvSpPr>
-          <p:nvPr>
-            <p:ph type="sldNum" sz="quarter" idx="7"/>
-          </p:nvPr>
-        </p:nvSpPr>
-        <p:spPr/>
-        <p:txBody>
-          <a:bodyPr/>
-          <a:lstStyle/>
-          <a:p>
-            <a:fld id="{B6F15528-21DE-4FAA-801E-634DDDAF4B2B}" type="slidenum">
-              <a:rPr/>
-              <a:t>26</a:t>
-            </a:fld>
-            <a:endParaRPr/>
-          </a:p>
-        </p:txBody>
-      </p:sp>
-    </p:spTree>
-  </p:cSld>
-  <p:clrMapOvr>
-    <a:masterClrMapping/>
-  </p:clrMapOvr>
-</p:sld>
-</file>
-
-<file path=ppt/slides/slide27.xml><?xml version="1.0" encoding="utf-8"?>
-<p:sld xmlns:a="http://schemas.openxmlformats.org/drawingml/2006/main" xmlns:r="http://schemas.openxmlformats.org/officeDocument/2006/relationships" xmlns:p="http://schemas.openxmlformats.org/presentationml/2006/main">
-  <p:cSld>
-    <p:spTree>
-      <p:nvGrpSpPr>
-        <p:cNvPr id="1" name=""/>
-        <p:cNvGrpSpPr/>
-        <p:nvPr/>
-      </p:nvGrpSpPr>
-      <p:grpSpPr>
-        <a:xfrm>
-          <a:off x="0" y="0"/>
-          <a:ext cx="0" cy="0"/>
-          <a:chOff x="0" y="0"/>
-          <a:chExt cx="0" cy="0"/>
-        </a:xfrm>
-      </p:grpSpPr>
-      <p:sp>
-        <p:nvSpPr>
-          <p:cNvPr id="2" name="object 2"/>
-          <p:cNvSpPr/>
-          <p:nvPr/>
-        </p:nvSpPr>
-        <p:spPr>
-          <a:xfrm>
-            <a:off x="6096761" y="1762505"/>
-            <a:ext cx="0" cy="4645660"/>
-          </a:xfrm>
-          <a:custGeom>
-            <a:avLst/>
-            <a:gdLst/>
-            <a:ahLst/>
-            <a:cxnLst/>
-            <a:rect l="l" t="t" r="r" b="b"/>
-            <a:pathLst>
-              <a:path h="4645660">
-                <a:moveTo>
-                  <a:pt x="0" y="0"/>
-                </a:moveTo>
-                <a:lnTo>
-                  <a:pt x="0" y="4645482"/>
-                </a:lnTo>
-              </a:path>
-            </a:pathLst>
-          </a:custGeom>
-          <a:ln w="25908">
-            <a:solidFill>
-              <a:srgbClr val="EF5A28"/>
-            </a:solidFill>
-          </a:ln>
-        </p:spPr>
-        <p:txBody>
-          <a:bodyPr wrap="square" lIns="0" tIns="0" rIns="0" bIns="0" rtlCol="0"/>
-          <a:lstStyle/>
-          <a:p>
-            <a:endParaRPr/>
-          </a:p>
-        </p:txBody>
-      </p:sp>
-      <p:pic>
-        <p:nvPicPr>
-          <p:cNvPr id="3" name="object 3"/>
-          <p:cNvPicPr/>
-          <p:nvPr/>
-        </p:nvPicPr>
-        <p:blipFill>
-          <a:blip r:embed="rId2" cstate="print"/>
-          <a:stretch>
-            <a:fillRect/>
-          </a:stretch>
-        </p:blipFill>
-        <p:spPr>
-          <a:xfrm>
-            <a:off x="5205984" y="1762632"/>
-            <a:ext cx="815339" cy="365760"/>
-          </a:xfrm>
-          <a:prstGeom prst="rect">
-            <a:avLst/>
-          </a:prstGeom>
-        </p:spPr>
-      </p:pic>
-      <p:pic>
-        <p:nvPicPr>
-          <p:cNvPr id="4" name="object 4"/>
-          <p:cNvPicPr/>
-          <p:nvPr/>
-        </p:nvPicPr>
-        <p:blipFill>
-          <a:blip r:embed="rId3" cstate="print"/>
-          <a:stretch>
-            <a:fillRect/>
-          </a:stretch>
-        </p:blipFill>
-        <p:spPr>
-          <a:xfrm>
-            <a:off x="1049426" y="2399029"/>
-            <a:ext cx="4938776" cy="304800"/>
-          </a:xfrm>
-          <a:prstGeom prst="rect">
-            <a:avLst/>
-          </a:prstGeom>
-        </p:spPr>
-      </p:pic>
-      <p:pic>
-        <p:nvPicPr>
-          <p:cNvPr id="5" name="object 5"/>
-          <p:cNvPicPr/>
-          <p:nvPr/>
-        </p:nvPicPr>
-        <p:blipFill>
-          <a:blip r:embed="rId4" cstate="print"/>
-          <a:stretch>
-            <a:fillRect/>
-          </a:stretch>
-        </p:blipFill>
-        <p:spPr>
-          <a:xfrm>
-            <a:off x="3980688" y="2901645"/>
-            <a:ext cx="2002789" cy="305104"/>
-          </a:xfrm>
-          <a:prstGeom prst="rect">
-            <a:avLst/>
-          </a:prstGeom>
-        </p:spPr>
-      </p:pic>
-      <p:pic>
-        <p:nvPicPr>
-          <p:cNvPr id="6" name="object 6"/>
-          <p:cNvPicPr/>
-          <p:nvPr/>
-        </p:nvPicPr>
-        <p:blipFill>
-          <a:blip r:embed="rId5" cstate="print"/>
-          <a:stretch>
-            <a:fillRect/>
-          </a:stretch>
-        </p:blipFill>
-        <p:spPr>
-          <a:xfrm>
-            <a:off x="2169922" y="3405251"/>
-            <a:ext cx="3820160" cy="304800"/>
-          </a:xfrm>
-          <a:prstGeom prst="rect">
-            <a:avLst/>
-          </a:prstGeom>
-        </p:spPr>
-      </p:pic>
-      <p:pic>
-        <p:nvPicPr>
-          <p:cNvPr id="7" name="object 7"/>
-          <p:cNvPicPr/>
-          <p:nvPr/>
-        </p:nvPicPr>
-        <p:blipFill>
-          <a:blip r:embed="rId6" cstate="print"/>
-          <a:stretch>
-            <a:fillRect/>
-          </a:stretch>
-        </p:blipFill>
-        <p:spPr>
-          <a:xfrm>
-            <a:off x="3215385" y="3908171"/>
-            <a:ext cx="2775077" cy="304800"/>
-          </a:xfrm>
-          <a:prstGeom prst="rect">
-            <a:avLst/>
-          </a:prstGeom>
-        </p:spPr>
-      </p:pic>
-      <p:pic>
-        <p:nvPicPr>
-          <p:cNvPr id="8" name="object 8"/>
-          <p:cNvPicPr/>
-          <p:nvPr/>
-        </p:nvPicPr>
-        <p:blipFill>
-          <a:blip r:embed="rId7" cstate="print"/>
-          <a:stretch>
-            <a:fillRect/>
-          </a:stretch>
-        </p:blipFill>
-        <p:spPr>
-          <a:xfrm>
-            <a:off x="6391655" y="1762632"/>
-            <a:ext cx="1167142" cy="365760"/>
-          </a:xfrm>
-          <a:prstGeom prst="rect">
-            <a:avLst/>
-          </a:prstGeom>
-        </p:spPr>
-      </p:pic>
-      <p:pic>
-        <p:nvPicPr>
-          <p:cNvPr id="9" name="object 9"/>
-          <p:cNvPicPr/>
-          <p:nvPr/>
-        </p:nvPicPr>
-        <p:blipFill>
-          <a:blip r:embed="rId8" cstate="print"/>
-          <a:stretch>
-            <a:fillRect/>
-          </a:stretch>
-        </p:blipFill>
-        <p:spPr>
-          <a:xfrm>
-            <a:off x="6333744" y="2399029"/>
-            <a:ext cx="4737734" cy="304800"/>
-          </a:xfrm>
-          <a:prstGeom prst="rect">
-            <a:avLst/>
-          </a:prstGeom>
-        </p:spPr>
-      </p:pic>
-      <p:pic>
-        <p:nvPicPr>
-          <p:cNvPr id="10" name="object 10"/>
-          <p:cNvPicPr/>
-          <p:nvPr/>
-        </p:nvPicPr>
-        <p:blipFill>
-          <a:blip r:embed="rId9" cstate="print"/>
-          <a:stretch>
-            <a:fillRect/>
-          </a:stretch>
-        </p:blipFill>
-        <p:spPr>
-          <a:xfrm>
-            <a:off x="6333744" y="2901645"/>
-            <a:ext cx="1390523" cy="305104"/>
-          </a:xfrm>
-          <a:prstGeom prst="rect">
-            <a:avLst/>
-          </a:prstGeom>
-        </p:spPr>
-      </p:pic>
-      <p:pic>
-        <p:nvPicPr>
-          <p:cNvPr id="11" name="object 11"/>
-          <p:cNvPicPr/>
-          <p:nvPr/>
-        </p:nvPicPr>
-        <p:blipFill>
-          <a:blip r:embed="rId10" cstate="print"/>
-          <a:stretch>
-            <a:fillRect/>
-          </a:stretch>
-        </p:blipFill>
-        <p:spPr>
-          <a:xfrm>
-            <a:off x="6333744" y="3405251"/>
-            <a:ext cx="5005578" cy="304800"/>
-          </a:xfrm>
-          <a:prstGeom prst="rect">
-            <a:avLst/>
-          </a:prstGeom>
-        </p:spPr>
-      </p:pic>
-      <p:pic>
-        <p:nvPicPr>
-          <p:cNvPr id="12" name="object 12"/>
-          <p:cNvPicPr/>
-          <p:nvPr/>
-        </p:nvPicPr>
-        <p:blipFill>
-          <a:blip r:embed="rId11" cstate="print"/>
-          <a:stretch>
-            <a:fillRect/>
-          </a:stretch>
-        </p:blipFill>
-        <p:spPr>
-          <a:xfrm>
-            <a:off x="6333744" y="3908171"/>
-            <a:ext cx="1935352" cy="304800"/>
-          </a:xfrm>
-          <a:prstGeom prst="rect">
-            <a:avLst/>
-          </a:prstGeom>
-        </p:spPr>
-      </p:pic>
-      <p:sp>
-        <p:nvSpPr>
-          <p:cNvPr id="13" name="Slide Number Placeholder 12"/>
-          <p:cNvSpPr>
-            <a:spLocks noGrp="1"/>
-          </p:cNvSpPr>
-          <p:nvPr>
-            <p:ph type="sldNum" sz="quarter" idx="7"/>
-          </p:nvPr>
-        </p:nvSpPr>
-        <p:spPr/>
-        <p:txBody>
-          <a:bodyPr/>
-          <a:lstStyle/>
-          <a:p>
-            <a:fld id="{B6F15528-21DE-4FAA-801E-634DDDAF4B2B}" type="slidenum">
-              <a:rPr/>
-              <a:t>27</a:t>
-            </a:fld>
-            <a:endParaRPr/>
-          </a:p>
-        </p:txBody>
-      </p:sp>
-    </p:spTree>
-  </p:cSld>
-  <p:clrMapOvr>
-    <a:masterClrMapping/>
-  </p:clrMapOvr>
-</p:sld>
-</file>
-
-<file path=ppt/slides/slide28.xml><?xml version="1.0" encoding="utf-8"?>
-<p:sld xmlns:a="http://schemas.openxmlformats.org/drawingml/2006/main" xmlns:r="http://schemas.openxmlformats.org/officeDocument/2006/relationships" xmlns:p="http://schemas.openxmlformats.org/presentationml/2006/main">
-  <p:cSld>
-    <p:spTree>
-      <p:nvGrpSpPr>
-        <p:cNvPr id="1" name=""/>
-        <p:cNvGrpSpPr/>
-        <p:nvPr/>
-      </p:nvGrpSpPr>
-      <p:grpSpPr>
-        <a:xfrm>
-          <a:off x="0" y="0"/>
-          <a:ext cx="0" cy="0"/>
-          <a:chOff x="0" y="0"/>
-          <a:chExt cx="0" cy="0"/>
-        </a:xfrm>
-      </p:grpSpPr>
-      <p:sp>
-        <p:nvSpPr>
-          <p:cNvPr id="2" name="object 2"/>
-          <p:cNvSpPr/>
-          <p:nvPr/>
-        </p:nvSpPr>
-        <p:spPr>
-          <a:xfrm>
-            <a:off x="6096761" y="1762505"/>
-            <a:ext cx="0" cy="4645660"/>
-          </a:xfrm>
-          <a:custGeom>
-            <a:avLst/>
-            <a:gdLst/>
-            <a:ahLst/>
-            <a:cxnLst/>
-            <a:rect l="l" t="t" r="r" b="b"/>
-            <a:pathLst>
-              <a:path h="4645660">
-                <a:moveTo>
-                  <a:pt x="0" y="0"/>
-                </a:moveTo>
-                <a:lnTo>
-                  <a:pt x="0" y="4645482"/>
-                </a:lnTo>
-              </a:path>
-            </a:pathLst>
-          </a:custGeom>
-          <a:ln w="25908">
-            <a:solidFill>
-              <a:srgbClr val="EF5A28"/>
-            </a:solidFill>
-          </a:ln>
-        </p:spPr>
-        <p:txBody>
-          <a:bodyPr wrap="square" lIns="0" tIns="0" rIns="0" bIns="0" rtlCol="0"/>
-          <a:lstStyle/>
-          <a:p>
-            <a:endParaRPr/>
-          </a:p>
-        </p:txBody>
-      </p:sp>
-      <p:pic>
-        <p:nvPicPr>
-          <p:cNvPr id="3" name="object 3"/>
-          <p:cNvPicPr/>
-          <p:nvPr/>
-        </p:nvPicPr>
-        <p:blipFill>
-          <a:blip r:embed="rId2" cstate="print"/>
-          <a:stretch>
-            <a:fillRect/>
-          </a:stretch>
-        </p:blipFill>
-        <p:spPr>
-          <a:xfrm>
-            <a:off x="5205984" y="1762632"/>
-            <a:ext cx="815339" cy="365760"/>
-          </a:xfrm>
-          <a:prstGeom prst="rect">
-            <a:avLst/>
-          </a:prstGeom>
-        </p:spPr>
-      </p:pic>
-      <p:pic>
-        <p:nvPicPr>
-          <p:cNvPr id="4" name="object 4"/>
-          <p:cNvPicPr/>
-          <p:nvPr/>
-        </p:nvPicPr>
-        <p:blipFill>
-          <a:blip r:embed="rId3" cstate="print"/>
-          <a:stretch>
-            <a:fillRect/>
-          </a:stretch>
-        </p:blipFill>
-        <p:spPr>
-          <a:xfrm>
-            <a:off x="1049426" y="2399029"/>
-            <a:ext cx="4938776" cy="304800"/>
-          </a:xfrm>
-          <a:prstGeom prst="rect">
-            <a:avLst/>
-          </a:prstGeom>
-        </p:spPr>
-      </p:pic>
-      <p:pic>
-        <p:nvPicPr>
-          <p:cNvPr id="5" name="object 5"/>
-          <p:cNvPicPr/>
-          <p:nvPr/>
-        </p:nvPicPr>
-        <p:blipFill>
-          <a:blip r:embed="rId4" cstate="print"/>
-          <a:stretch>
-            <a:fillRect/>
-          </a:stretch>
-        </p:blipFill>
-        <p:spPr>
-          <a:xfrm>
-            <a:off x="3980688" y="2901645"/>
-            <a:ext cx="2002789" cy="305104"/>
-          </a:xfrm>
-          <a:prstGeom prst="rect">
-            <a:avLst/>
-          </a:prstGeom>
-        </p:spPr>
-      </p:pic>
-      <p:pic>
-        <p:nvPicPr>
-          <p:cNvPr id="6" name="object 6"/>
-          <p:cNvPicPr/>
-          <p:nvPr/>
-        </p:nvPicPr>
-        <p:blipFill>
-          <a:blip r:embed="rId5" cstate="print"/>
-          <a:stretch>
-            <a:fillRect/>
-          </a:stretch>
-        </p:blipFill>
-        <p:spPr>
-          <a:xfrm>
-            <a:off x="2169922" y="3405251"/>
-            <a:ext cx="3820160" cy="304800"/>
-          </a:xfrm>
-          <a:prstGeom prst="rect">
-            <a:avLst/>
-          </a:prstGeom>
-        </p:spPr>
-      </p:pic>
-      <p:pic>
-        <p:nvPicPr>
-          <p:cNvPr id="7" name="object 7"/>
-          <p:cNvPicPr/>
-          <p:nvPr/>
-        </p:nvPicPr>
-        <p:blipFill>
-          <a:blip r:embed="rId6" cstate="print"/>
-          <a:stretch>
-            <a:fillRect/>
-          </a:stretch>
-        </p:blipFill>
-        <p:spPr>
-          <a:xfrm>
-            <a:off x="3215385" y="3908171"/>
-            <a:ext cx="2775077" cy="304800"/>
-          </a:xfrm>
-          <a:prstGeom prst="rect">
-            <a:avLst/>
-          </a:prstGeom>
-        </p:spPr>
-      </p:pic>
-      <p:pic>
-        <p:nvPicPr>
-          <p:cNvPr id="8" name="object 8"/>
-          <p:cNvPicPr/>
-          <p:nvPr/>
-        </p:nvPicPr>
-        <p:blipFill>
-          <a:blip r:embed="rId7" cstate="print"/>
-          <a:stretch>
-            <a:fillRect/>
-          </a:stretch>
-        </p:blipFill>
-        <p:spPr>
-          <a:xfrm>
-            <a:off x="962558" y="4411345"/>
-            <a:ext cx="5031739" cy="304800"/>
-          </a:xfrm>
-          <a:prstGeom prst="rect">
-            <a:avLst/>
-          </a:prstGeom>
-        </p:spPr>
-      </p:pic>
-      <p:pic>
-        <p:nvPicPr>
-          <p:cNvPr id="9" name="object 9"/>
-          <p:cNvPicPr/>
-          <p:nvPr/>
-        </p:nvPicPr>
-        <p:blipFill>
-          <a:blip r:embed="rId8" cstate="print"/>
-          <a:stretch>
-            <a:fillRect/>
-          </a:stretch>
-        </p:blipFill>
-        <p:spPr>
-          <a:xfrm>
-            <a:off x="6391655" y="1762632"/>
-            <a:ext cx="1167142" cy="365760"/>
-          </a:xfrm>
-          <a:prstGeom prst="rect">
-            <a:avLst/>
-          </a:prstGeom>
-        </p:spPr>
-      </p:pic>
-      <p:pic>
-        <p:nvPicPr>
-          <p:cNvPr id="10" name="object 10"/>
-          <p:cNvPicPr/>
-          <p:nvPr/>
-        </p:nvPicPr>
-        <p:blipFill>
-          <a:blip r:embed="rId9" cstate="print"/>
-          <a:stretch>
-            <a:fillRect/>
-          </a:stretch>
-        </p:blipFill>
-        <p:spPr>
-          <a:xfrm>
-            <a:off x="6333744" y="2399029"/>
-            <a:ext cx="4737734" cy="304800"/>
-          </a:xfrm>
-          <a:prstGeom prst="rect">
-            <a:avLst/>
-          </a:prstGeom>
-        </p:spPr>
-      </p:pic>
-      <p:pic>
-        <p:nvPicPr>
-          <p:cNvPr id="11" name="object 11"/>
-          <p:cNvPicPr/>
-          <p:nvPr/>
-        </p:nvPicPr>
-        <p:blipFill>
-          <a:blip r:embed="rId10" cstate="print"/>
-          <a:stretch>
-            <a:fillRect/>
-          </a:stretch>
-        </p:blipFill>
-        <p:spPr>
-          <a:xfrm>
-            <a:off x="6333744" y="2901645"/>
-            <a:ext cx="1390523" cy="305104"/>
-          </a:xfrm>
-          <a:prstGeom prst="rect">
-            <a:avLst/>
-          </a:prstGeom>
-        </p:spPr>
-      </p:pic>
-      <p:pic>
-        <p:nvPicPr>
-          <p:cNvPr id="12" name="object 12"/>
-          <p:cNvPicPr/>
-          <p:nvPr/>
-        </p:nvPicPr>
-        <p:blipFill>
-          <a:blip r:embed="rId11" cstate="print"/>
-          <a:stretch>
-            <a:fillRect/>
-          </a:stretch>
-        </p:blipFill>
-        <p:spPr>
-          <a:xfrm>
-            <a:off x="6333744" y="3405251"/>
-            <a:ext cx="5005578" cy="304800"/>
-          </a:xfrm>
-          <a:prstGeom prst="rect">
-            <a:avLst/>
-          </a:prstGeom>
-        </p:spPr>
-      </p:pic>
-      <p:pic>
-        <p:nvPicPr>
-          <p:cNvPr id="13" name="object 13"/>
-          <p:cNvPicPr/>
-          <p:nvPr/>
-        </p:nvPicPr>
-        <p:blipFill>
-          <a:blip r:embed="rId12" cstate="print"/>
-          <a:stretch>
-            <a:fillRect/>
-          </a:stretch>
-        </p:blipFill>
-        <p:spPr>
-          <a:xfrm>
-            <a:off x="6333744" y="3908171"/>
-            <a:ext cx="1935352" cy="304800"/>
-          </a:xfrm>
-          <a:prstGeom prst="rect">
-            <a:avLst/>
-          </a:prstGeom>
-        </p:spPr>
-      </p:pic>
-      <p:pic>
-        <p:nvPicPr>
-          <p:cNvPr id="14" name="object 14"/>
-          <p:cNvPicPr/>
-          <p:nvPr/>
-        </p:nvPicPr>
-        <p:blipFill>
-          <a:blip r:embed="rId13" cstate="print"/>
-          <a:stretch>
-            <a:fillRect/>
-          </a:stretch>
-        </p:blipFill>
-        <p:spPr>
-          <a:xfrm>
-            <a:off x="6333744" y="4411345"/>
-            <a:ext cx="5003546" cy="304800"/>
-          </a:xfrm>
-          <a:prstGeom prst="rect">
-            <a:avLst/>
-          </a:prstGeom>
-        </p:spPr>
-      </p:pic>
-      <p:sp>
-        <p:nvSpPr>
-          <p:cNvPr id="15" name="Slide Number Placeholder 14"/>
-          <p:cNvSpPr>
-            <a:spLocks noGrp="1"/>
-          </p:cNvSpPr>
-          <p:nvPr>
-            <p:ph type="sldNum" sz="quarter" idx="7"/>
-          </p:nvPr>
-        </p:nvSpPr>
-        <p:spPr/>
-        <p:txBody>
-          <a:bodyPr/>
-          <a:lstStyle/>
-          <a:p>
-            <a:fld id="{B6F15528-21DE-4FAA-801E-634DDDAF4B2B}" type="slidenum">
-              <a:rPr/>
-              <a:t>28</a:t>
-            </a:fld>
-            <a:endParaRPr/>
-          </a:p>
-        </p:txBody>
-      </p:sp>
-    </p:spTree>
-  </p:cSld>
-  <p:clrMapOvr>
-    <a:masterClrMapping/>
-  </p:clrMapOvr>
-</p:sld>
-</file>
-
-<file path=ppt/slides/slide29.xml><?xml version="1.0" encoding="utf-8"?>
-<p:sld xmlns:a="http://schemas.openxmlformats.org/drawingml/2006/main" xmlns:r="http://schemas.openxmlformats.org/officeDocument/2006/relationships" xmlns:p="http://schemas.openxmlformats.org/presentationml/2006/main">
-  <p:cSld>
-    <p:spTree>
-      <p:nvGrpSpPr>
-        <p:cNvPr id="1" name=""/>
-        <p:cNvGrpSpPr/>
-        <p:nvPr/>
-      </p:nvGrpSpPr>
-      <p:grpSpPr>
-        <a:xfrm>
-          <a:off x="0" y="0"/>
-          <a:ext cx="0" cy="0"/>
-          <a:chOff x="0" y="0"/>
-          <a:chExt cx="0" cy="0"/>
-        </a:xfrm>
-      </p:grpSpPr>
-      <p:sp>
-        <p:nvSpPr>
-          <p:cNvPr id="2" name="object 2"/>
-          <p:cNvSpPr/>
-          <p:nvPr/>
-        </p:nvSpPr>
-        <p:spPr>
-          <a:xfrm>
-            <a:off x="6096761" y="1762505"/>
-            <a:ext cx="0" cy="4645660"/>
-          </a:xfrm>
-          <a:custGeom>
-            <a:avLst/>
-            <a:gdLst/>
-            <a:ahLst/>
-            <a:cxnLst/>
-            <a:rect l="l" t="t" r="r" b="b"/>
-            <a:pathLst>
-              <a:path h="4645660">
-                <a:moveTo>
-                  <a:pt x="0" y="0"/>
-                </a:moveTo>
-                <a:lnTo>
-                  <a:pt x="0" y="4645482"/>
-                </a:lnTo>
-              </a:path>
-            </a:pathLst>
-          </a:custGeom>
-          <a:ln w="25908">
-            <a:solidFill>
-              <a:srgbClr val="EF5A28"/>
-            </a:solidFill>
-          </a:ln>
-        </p:spPr>
-        <p:txBody>
-          <a:bodyPr wrap="square" lIns="0" tIns="0" rIns="0" bIns="0" rtlCol="0"/>
-          <a:lstStyle/>
-          <a:p>
-            <a:endParaRPr/>
-          </a:p>
-        </p:txBody>
-      </p:sp>
-      <p:pic>
-        <p:nvPicPr>
-          <p:cNvPr id="3" name="object 3"/>
-          <p:cNvPicPr/>
-          <p:nvPr/>
-        </p:nvPicPr>
-        <p:blipFill>
-          <a:blip r:embed="rId2" cstate="print"/>
-          <a:stretch>
-            <a:fillRect/>
-          </a:stretch>
-        </p:blipFill>
-        <p:spPr>
-          <a:xfrm>
-            <a:off x="5205984" y="1762632"/>
-            <a:ext cx="815339" cy="365760"/>
-          </a:xfrm>
-          <a:prstGeom prst="rect">
-            <a:avLst/>
-          </a:prstGeom>
-        </p:spPr>
-      </p:pic>
-      <p:pic>
-        <p:nvPicPr>
-          <p:cNvPr id="4" name="object 4"/>
-          <p:cNvPicPr/>
-          <p:nvPr/>
-        </p:nvPicPr>
-        <p:blipFill>
-          <a:blip r:embed="rId3" cstate="print"/>
-          <a:stretch>
-            <a:fillRect/>
-          </a:stretch>
-        </p:blipFill>
-        <p:spPr>
-          <a:xfrm>
-            <a:off x="1049426" y="2399029"/>
-            <a:ext cx="4938776" cy="304800"/>
-          </a:xfrm>
-          <a:prstGeom prst="rect">
-            <a:avLst/>
-          </a:prstGeom>
-        </p:spPr>
-      </p:pic>
-      <p:pic>
-        <p:nvPicPr>
-          <p:cNvPr id="5" name="object 5"/>
-          <p:cNvPicPr/>
-          <p:nvPr/>
-        </p:nvPicPr>
-        <p:blipFill>
-          <a:blip r:embed="rId4" cstate="print"/>
-          <a:stretch>
-            <a:fillRect/>
-          </a:stretch>
-        </p:blipFill>
-        <p:spPr>
-          <a:xfrm>
-            <a:off x="3980688" y="2901645"/>
-            <a:ext cx="2002789" cy="305104"/>
-          </a:xfrm>
-          <a:prstGeom prst="rect">
-            <a:avLst/>
-          </a:prstGeom>
-        </p:spPr>
-      </p:pic>
-      <p:pic>
-        <p:nvPicPr>
-          <p:cNvPr id="6" name="object 6"/>
-          <p:cNvPicPr/>
-          <p:nvPr/>
-        </p:nvPicPr>
-        <p:blipFill>
-          <a:blip r:embed="rId5" cstate="print"/>
-          <a:stretch>
-            <a:fillRect/>
-          </a:stretch>
-        </p:blipFill>
-        <p:spPr>
-          <a:xfrm>
-            <a:off x="2169922" y="3405251"/>
-            <a:ext cx="3820160" cy="304800"/>
-          </a:xfrm>
-          <a:prstGeom prst="rect">
-            <a:avLst/>
-          </a:prstGeom>
-        </p:spPr>
-      </p:pic>
-      <p:pic>
-        <p:nvPicPr>
-          <p:cNvPr id="7" name="object 7"/>
-          <p:cNvPicPr/>
-          <p:nvPr/>
-        </p:nvPicPr>
-        <p:blipFill>
-          <a:blip r:embed="rId6" cstate="print"/>
-          <a:stretch>
-            <a:fillRect/>
-          </a:stretch>
-        </p:blipFill>
-        <p:spPr>
-          <a:xfrm>
-            <a:off x="3215385" y="3908171"/>
-            <a:ext cx="2775077" cy="304800"/>
-          </a:xfrm>
-          <a:prstGeom prst="rect">
-            <a:avLst/>
-          </a:prstGeom>
-        </p:spPr>
-      </p:pic>
-      <p:pic>
-        <p:nvPicPr>
-          <p:cNvPr id="8" name="object 8"/>
-          <p:cNvPicPr/>
-          <p:nvPr/>
-        </p:nvPicPr>
-        <p:blipFill>
-          <a:blip r:embed="rId7" cstate="print"/>
-          <a:stretch>
-            <a:fillRect/>
-          </a:stretch>
-        </p:blipFill>
-        <p:spPr>
-          <a:xfrm>
-            <a:off x="962558" y="4411345"/>
-            <a:ext cx="5031739" cy="304800"/>
-          </a:xfrm>
-          <a:prstGeom prst="rect">
-            <a:avLst/>
-          </a:prstGeom>
-        </p:spPr>
-      </p:pic>
-      <p:pic>
-        <p:nvPicPr>
-          <p:cNvPr id="9" name="object 9"/>
-          <p:cNvPicPr/>
-          <p:nvPr/>
-        </p:nvPicPr>
-        <p:blipFill>
-          <a:blip r:embed="rId8" cstate="print"/>
-          <a:stretch>
-            <a:fillRect/>
-          </a:stretch>
-        </p:blipFill>
-        <p:spPr>
-          <a:xfrm>
-            <a:off x="3759453" y="4914265"/>
-            <a:ext cx="2229993" cy="304800"/>
-          </a:xfrm>
-          <a:prstGeom prst="rect">
-            <a:avLst/>
-          </a:prstGeom>
-        </p:spPr>
-      </p:pic>
-      <p:pic>
-        <p:nvPicPr>
-          <p:cNvPr id="10" name="object 10"/>
-          <p:cNvPicPr/>
-          <p:nvPr/>
-        </p:nvPicPr>
-        <p:blipFill>
-          <a:blip r:embed="rId9" cstate="print"/>
-          <a:stretch>
-            <a:fillRect/>
-          </a:stretch>
-        </p:blipFill>
-        <p:spPr>
-          <a:xfrm>
-            <a:off x="6391655" y="1762632"/>
-            <a:ext cx="1167142" cy="365760"/>
-          </a:xfrm>
-          <a:prstGeom prst="rect">
-            <a:avLst/>
-          </a:prstGeom>
-        </p:spPr>
-      </p:pic>
-      <p:pic>
-        <p:nvPicPr>
-          <p:cNvPr id="11" name="object 11"/>
-          <p:cNvPicPr/>
-          <p:nvPr/>
-        </p:nvPicPr>
-        <p:blipFill>
-          <a:blip r:embed="rId10" cstate="print"/>
-          <a:stretch>
-            <a:fillRect/>
-          </a:stretch>
-        </p:blipFill>
-        <p:spPr>
-          <a:xfrm>
-            <a:off x="6333744" y="2399029"/>
-            <a:ext cx="4737734" cy="304800"/>
-          </a:xfrm>
-          <a:prstGeom prst="rect">
-            <a:avLst/>
-          </a:prstGeom>
-        </p:spPr>
-      </p:pic>
-      <p:pic>
-        <p:nvPicPr>
-          <p:cNvPr id="12" name="object 12"/>
-          <p:cNvPicPr/>
-          <p:nvPr/>
-        </p:nvPicPr>
-        <p:blipFill>
-          <a:blip r:embed="rId11" cstate="print"/>
-          <a:stretch>
-            <a:fillRect/>
-          </a:stretch>
-        </p:blipFill>
-        <p:spPr>
-          <a:xfrm>
-            <a:off x="6333744" y="2901645"/>
-            <a:ext cx="1390523" cy="305104"/>
-          </a:xfrm>
-          <a:prstGeom prst="rect">
-            <a:avLst/>
-          </a:prstGeom>
-        </p:spPr>
-      </p:pic>
-      <p:pic>
-        <p:nvPicPr>
-          <p:cNvPr id="13" name="object 13"/>
-          <p:cNvPicPr/>
-          <p:nvPr/>
-        </p:nvPicPr>
-        <p:blipFill>
-          <a:blip r:embed="rId12" cstate="print"/>
-          <a:stretch>
-            <a:fillRect/>
-          </a:stretch>
-        </p:blipFill>
-        <p:spPr>
-          <a:xfrm>
-            <a:off x="6333744" y="3405251"/>
-            <a:ext cx="5005578" cy="304800"/>
-          </a:xfrm>
-          <a:prstGeom prst="rect">
-            <a:avLst/>
-          </a:prstGeom>
-        </p:spPr>
-      </p:pic>
-      <p:pic>
-        <p:nvPicPr>
-          <p:cNvPr id="14" name="object 14"/>
-          <p:cNvPicPr/>
-          <p:nvPr/>
-        </p:nvPicPr>
-        <p:blipFill>
-          <a:blip r:embed="rId13" cstate="print"/>
-          <a:stretch>
-            <a:fillRect/>
-          </a:stretch>
-        </p:blipFill>
-        <p:spPr>
-          <a:xfrm>
-            <a:off x="6333744" y="3908171"/>
-            <a:ext cx="1935352" cy="304800"/>
-          </a:xfrm>
-          <a:prstGeom prst="rect">
-            <a:avLst/>
-          </a:prstGeom>
-        </p:spPr>
-      </p:pic>
-      <p:pic>
-        <p:nvPicPr>
-          <p:cNvPr id="15" name="object 15"/>
-          <p:cNvPicPr/>
-          <p:nvPr/>
-        </p:nvPicPr>
-        <p:blipFill>
-          <a:blip r:embed="rId14" cstate="print"/>
-          <a:stretch>
-            <a:fillRect/>
-          </a:stretch>
-        </p:blipFill>
-        <p:spPr>
-          <a:xfrm>
-            <a:off x="6333744" y="4411345"/>
-            <a:ext cx="5003546" cy="304800"/>
-          </a:xfrm>
-          <a:prstGeom prst="rect">
-            <a:avLst/>
-          </a:prstGeom>
-        </p:spPr>
-      </p:pic>
-      <p:pic>
-        <p:nvPicPr>
-          <p:cNvPr id="16" name="object 16"/>
-          <p:cNvPicPr/>
-          <p:nvPr/>
-        </p:nvPicPr>
-        <p:blipFill>
-          <a:blip r:embed="rId15" cstate="print"/>
-          <a:stretch>
-            <a:fillRect/>
-          </a:stretch>
-        </p:blipFill>
-        <p:spPr>
-          <a:xfrm>
-            <a:off x="6333744" y="4914265"/>
-            <a:ext cx="2521077" cy="304800"/>
-          </a:xfrm>
-          <a:prstGeom prst="rect">
-            <a:avLst/>
-          </a:prstGeom>
-        </p:spPr>
-      </p:pic>
-      <p:sp>
-        <p:nvSpPr>
-          <p:cNvPr id="17" name="Slide Number Placeholder 16"/>
-          <p:cNvSpPr>
-            <a:spLocks noGrp="1"/>
-          </p:cNvSpPr>
-          <p:nvPr>
-            <p:ph type="sldNum" sz="quarter" idx="7"/>
-          </p:nvPr>
-        </p:nvSpPr>
-        <p:spPr/>
-        <p:txBody>
-          <a:bodyPr/>
-          <a:lstStyle/>
-          <a:p>
-            <a:fld id="{B6F15528-21DE-4FAA-801E-634DDDAF4B2B}" type="slidenum">
-              <a:rPr/>
-              <a:t>29</a:t>
-            </a:fld>
-            <a:endParaRPr/>
-          </a:p>
-        </p:txBody>
-      </p:sp>
-    </p:spTree>
-  </p:cSld>
-  <p:clrMapOvr>
-    <a:masterClrMapping/>
-  </p:clrMapOvr>
-</p:sld>
-</file>
-
-<file path=ppt/slides/slide3.xml><?xml version="1.0" encoding="utf-8"?>
-<p:sld xmlns:a="http://schemas.openxmlformats.org/drawingml/2006/main" xmlns:r="http://schemas.openxmlformats.org/officeDocument/2006/relationships" xmlns:p="http://schemas.openxmlformats.org/presentationml/2006/main">
-  <p:cSld>
-    <p:spTree>
-      <p:nvGrpSpPr>
-        <p:cNvPr id="1" name=""/>
-        <p:cNvGrpSpPr/>
-        <p:nvPr/>
-      </p:nvGrpSpPr>
-      <p:grpSpPr>
-        <a:xfrm>
-          <a:off x="0" y="0"/>
-          <a:ext cx="0" cy="0"/>
-          <a:chOff x="0" y="0"/>
-          <a:chExt cx="0" cy="0"/>
-        </a:xfrm>
-      </p:grpSpPr>
-      <p:pic>
-        <p:nvPicPr>
-          <p:cNvPr id="2" name="object 2"/>
-          <p:cNvPicPr/>
-          <p:nvPr/>
-        </p:nvPicPr>
-        <p:blipFill>
-          <a:blip r:embed="rId2" cstate="print"/>
-          <a:stretch>
-            <a:fillRect/>
-          </a:stretch>
-        </p:blipFill>
-        <p:spPr>
-          <a:xfrm>
-            <a:off x="712469" y="3410711"/>
-            <a:ext cx="10768584" cy="38100"/>
-          </a:xfrm>
-          <a:prstGeom prst="rect">
-            <a:avLst/>
-          </a:prstGeom>
-        </p:spPr>
-      </p:pic>
-      <p:pic>
-        <p:nvPicPr>
-          <p:cNvPr id="3" name="object 3"/>
-          <p:cNvPicPr/>
-          <p:nvPr/>
-        </p:nvPicPr>
-        <p:blipFill>
-          <a:blip r:embed="rId3" cstate="print"/>
-          <a:stretch>
-            <a:fillRect/>
-          </a:stretch>
-        </p:blipFill>
-        <p:spPr>
-          <a:xfrm>
-            <a:off x="7389621" y="2750820"/>
-            <a:ext cx="4254373" cy="548639"/>
-          </a:xfrm>
-          <a:prstGeom prst="rect">
-            <a:avLst/>
-          </a:prstGeom>
-        </p:spPr>
-      </p:pic>
-      <p:sp>
-        <p:nvSpPr>
-          <p:cNvPr id="4" name="Slide Number Placeholder 3"/>
-          <p:cNvSpPr>
-            <a:spLocks noGrp="1"/>
-          </p:cNvSpPr>
-          <p:nvPr>
-            <p:ph type="sldNum" sz="quarter" idx="7"/>
-          </p:nvPr>
-        </p:nvSpPr>
-        <p:spPr/>
-        <p:txBody>
-          <a:bodyPr/>
-          <a:lstStyle/>
-          <a:p>
-            <a:fld id="{B6F15528-21DE-4FAA-801E-634DDDAF4B2B}" type="slidenum">
-              <a:rPr/>
-              <a:t>3</a:t>
-            </a:fld>
-            <a:endParaRPr/>
-          </a:p>
-        </p:txBody>
-      </p:sp>
-    </p:spTree>
-  </p:cSld>
-  <p:clrMapOvr>
-    <a:masterClrMapping/>
-  </p:clrMapOvr>
-</p:sld>
-</file>
-
-<file path=ppt/slides/slide30.xml><?xml version="1.0" encoding="utf-8"?>
-<p:sld xmlns:a="http://schemas.openxmlformats.org/drawingml/2006/main" xmlns:r="http://schemas.openxmlformats.org/officeDocument/2006/relationships" xmlns:p="http://schemas.openxmlformats.org/presentationml/2006/main">
-  <p:cSld>
-    <p:spTree>
-      <p:nvGrpSpPr>
-        <p:cNvPr id="1" name=""/>
-        <p:cNvGrpSpPr/>
-        <p:nvPr/>
-      </p:nvGrpSpPr>
-      <p:grpSpPr>
-        <a:xfrm>
-          <a:off x="0" y="0"/>
-          <a:ext cx="0" cy="0"/>
-          <a:chOff x="0" y="0"/>
-          <a:chExt cx="0" cy="0"/>
-        </a:xfrm>
-      </p:grpSpPr>
-      <p:pic>
-        <p:nvPicPr>
-          <p:cNvPr id="2" name="object 2"/>
-          <p:cNvPicPr/>
-          <p:nvPr/>
-        </p:nvPicPr>
-        <p:blipFill>
-          <a:blip r:embed="rId2" cstate="print"/>
-          <a:stretch>
-            <a:fillRect/>
-          </a:stretch>
-        </p:blipFill>
-        <p:spPr>
-          <a:xfrm>
-            <a:off x="712469" y="3410711"/>
-            <a:ext cx="10768584" cy="38100"/>
-          </a:xfrm>
-          <a:prstGeom prst="rect">
-            <a:avLst/>
-          </a:prstGeom>
-        </p:spPr>
-      </p:pic>
-      <p:pic>
-        <p:nvPicPr>
-          <p:cNvPr id="3" name="object 3"/>
-          <p:cNvPicPr/>
-          <p:nvPr/>
-        </p:nvPicPr>
-        <p:blipFill>
-          <a:blip r:embed="rId3" cstate="print"/>
-          <a:stretch>
-            <a:fillRect/>
-          </a:stretch>
-        </p:blipFill>
-        <p:spPr>
-          <a:xfrm>
-            <a:off x="8715756" y="2750820"/>
-            <a:ext cx="2945765" cy="548639"/>
-          </a:xfrm>
-          <a:prstGeom prst="rect">
-            <a:avLst/>
-          </a:prstGeom>
-        </p:spPr>
-      </p:pic>
-      <p:sp>
-        <p:nvSpPr>
-          <p:cNvPr id="4" name="Slide Number Placeholder 3"/>
-          <p:cNvSpPr>
-            <a:spLocks noGrp="1"/>
-          </p:cNvSpPr>
-          <p:nvPr>
-            <p:ph type="sldNum" sz="quarter" idx="7"/>
-          </p:nvPr>
-        </p:nvSpPr>
-        <p:spPr/>
-        <p:txBody>
-          <a:bodyPr/>
-          <a:lstStyle/>
-          <a:p>
-            <a:fld id="{B6F15528-21DE-4FAA-801E-634DDDAF4B2B}" type="slidenum">
-              <a:rPr/>
-              <a:t>30</a:t>
-            </a:fld>
-            <a:endParaRPr/>
-          </a:p>
-        </p:txBody>
-      </p:sp>
-    </p:spTree>
-  </p:cSld>
-  <p:clrMapOvr>
-    <a:masterClrMapping/>
-  </p:clrMapOvr>
-</p:sld>
-</file>
-
-<file path=ppt/slides/slide31.xml><?xml version="1.0" encoding="utf-8"?>
 <p:sld xmlns:a="http://schemas.openxmlformats.org/drawingml/2006/main" xmlns:r="http://schemas.openxmlformats.org/officeDocument/2006/relationships" xmlns:p="http://schemas.openxmlformats.org/presentationml/2006/main">
   <p:cSld>
     <p:spTree>
@@ -27954,7 +23906,7 @@
           <a:p>
             <a:fld id="{B6F15528-21DE-4FAA-801E-634DDDAF4B2B}" type="slidenum">
               <a:rPr/>
-              <a:t>31</a:t>
+              <a:t>20</a:t>
             </a:fld>
             <a:endParaRPr/>
           </a:p>
@@ -27968,7 +23920,7 @@
 </p:sld>
 </file>
 
-<file path=ppt/slides/slide32.xml><?xml version="1.0" encoding="utf-8"?>
+<file path=ppt/slides/slide21.xml><?xml version="1.0" encoding="utf-8"?>
 <p:sld xmlns:a="http://schemas.openxmlformats.org/drawingml/2006/main" xmlns:r="http://schemas.openxmlformats.org/officeDocument/2006/relationships" xmlns:p="http://schemas.openxmlformats.org/presentationml/2006/main">
   <p:cSld>
     <p:spTree>
@@ -28213,7 +24165,7 @@
       </p:pic>
       <p:pic>
         <p:nvPicPr>
-          <p:cNvPr id="9" name="object 9"/>
+          <p:cNvPr id="10" name="object 10"/>
           <p:cNvPicPr/>
           <p:nvPr/>
         </p:nvPicPr>
@@ -28225,29 +24177,7 @@
         </p:blipFill>
         <p:spPr>
           <a:xfrm>
-            <a:off x="5240146" y="3507359"/>
-            <a:ext cx="2301367" cy="365759"/>
-          </a:xfrm>
-          <a:prstGeom prst="rect">
-            <a:avLst/>
-          </a:prstGeom>
-        </p:spPr>
-      </p:pic>
-      <p:pic>
-        <p:nvPicPr>
-          <p:cNvPr id="10" name="object 10"/>
-          <p:cNvPicPr/>
-          <p:nvPr/>
-        </p:nvPicPr>
-        <p:blipFill>
-          <a:blip r:embed="rId9" cstate="print"/>
-          <a:stretch>
-            <a:fillRect/>
-          </a:stretch>
-        </p:blipFill>
-        <p:spPr>
-          <a:xfrm>
-            <a:off x="5240146" y="4101668"/>
+            <a:off x="5240146" y="4053536"/>
             <a:ext cx="4203954" cy="366064"/>
           </a:xfrm>
           <a:prstGeom prst="rect">
@@ -28262,7 +24192,7 @@
           <p:nvPr/>
         </p:nvPicPr>
         <p:blipFill>
-          <a:blip r:embed="rId10" cstate="print"/>
+          <a:blip r:embed="rId9" cstate="print"/>
           <a:stretch>
             <a:fillRect/>
           </a:stretch>
@@ -28284,7 +24214,7 @@
           <p:nvPr/>
         </p:nvPicPr>
         <p:blipFill>
-          <a:blip r:embed="rId11" cstate="print"/>
+          <a:blip r:embed="rId10" cstate="print"/>
           <a:stretch>
             <a:fillRect/>
           </a:stretch>
@@ -28316,7 +24246,99 @@
           <a:p>
             <a:fld id="{B6F15528-21DE-4FAA-801E-634DDDAF4B2B}" type="slidenum">
               <a:rPr/>
-              <a:t>32</a:t>
+              <a:t>21</a:t>
+            </a:fld>
+            <a:endParaRPr/>
+          </a:p>
+        </p:txBody>
+      </p:sp>
+    </p:spTree>
+  </p:cSld>
+  <p:clrMapOvr>
+    <a:masterClrMapping/>
+  </p:clrMapOvr>
+</p:sld>
+</file>
+
+<file path=ppt/slides/slide3.xml><?xml version="1.0" encoding="utf-8"?>
+<p:sld xmlns:a="http://schemas.openxmlformats.org/drawingml/2006/main" xmlns:r="http://schemas.openxmlformats.org/officeDocument/2006/relationships" xmlns:p="http://schemas.openxmlformats.org/presentationml/2006/main">
+  <p:cSld>
+    <p:spTree>
+      <p:nvGrpSpPr>
+        <p:cNvPr id="1" name=""/>
+        <p:cNvGrpSpPr/>
+        <p:nvPr/>
+      </p:nvGrpSpPr>
+      <p:grpSpPr>
+        <a:xfrm>
+          <a:off x="0" y="0"/>
+          <a:ext cx="0" cy="0"/>
+          <a:chOff x="0" y="0"/>
+          <a:chExt cx="0" cy="0"/>
+        </a:xfrm>
+      </p:grpSpPr>
+      <p:pic>
+        <p:nvPicPr>
+          <p:cNvPr id="2" name="object 2"/>
+          <p:cNvPicPr/>
+          <p:nvPr/>
+        </p:nvPicPr>
+        <p:blipFill>
+          <a:blip r:embed="rId2" cstate="print"/>
+          <a:stretch>
+            <a:fillRect/>
+          </a:stretch>
+        </p:blipFill>
+        <p:spPr>
+          <a:xfrm>
+            <a:off x="712469" y="3410711"/>
+            <a:ext cx="10768584" cy="38100"/>
+          </a:xfrm>
+          <a:prstGeom prst="rect">
+            <a:avLst/>
+          </a:prstGeom>
+        </p:spPr>
+      </p:pic>
+      <p:pic>
+        <p:nvPicPr>
+          <p:cNvPr id="3" name="object 3"/>
+          <p:cNvPicPr/>
+          <p:nvPr/>
+        </p:nvPicPr>
+        <p:blipFill>
+          <a:blip r:embed="rId3" cstate="print"/>
+          <a:stretch>
+            <a:fillRect/>
+          </a:stretch>
+        </p:blipFill>
+        <p:spPr>
+          <a:xfrm>
+            <a:off x="7389621" y="2750820"/>
+            <a:ext cx="4254373" cy="548639"/>
+          </a:xfrm>
+          <a:prstGeom prst="rect">
+            <a:avLst/>
+          </a:prstGeom>
+        </p:spPr>
+      </p:pic>
+      <p:sp>
+        <p:nvSpPr>
+          <p:cNvPr id="4" name="Slide Number Placeholder 3"/>
+          <p:cNvSpPr>
+            <a:spLocks noGrp="1"/>
+          </p:cNvSpPr>
+          <p:nvPr>
+            <p:ph type="sldNum" sz="quarter" idx="7"/>
+          </p:nvPr>
+        </p:nvSpPr>
+        <p:spPr/>
+        <p:txBody>
+          <a:bodyPr/>
+          <a:lstStyle/>
+          <a:p>
+            <a:fld id="{B6F15528-21DE-4FAA-801E-634DDDAF4B2B}" type="slidenum">
+              <a:rPr/>
+              <a:t>3</a:t>
             </a:fld>
             <a:endParaRPr/>
           </a:p>

--- a/Training Materials/16. React with Redux/Slides/1. Intro to Redux/intro-to-redux-slides.pptx
+++ b/Training Materials/16. React with Redux/Slides/1. Intro to Redux/intro-to-redux-slides.pptx
@@ -225,7 +225,7 @@
           <a:p>
             <a:fld id="{3EFD42F7-718C-4B98-AAEC-167E6DDD60A7}" type="datetimeFigureOut">
               <a:rPr lang="en-US" smtClean="0"/>
-              <a:t>11/20/2025</a:t>
+              <a:t>12/1/2025</a:t>
             </a:fld>
             <a:endParaRPr lang="en-US"/>
           </a:p>
@@ -626,7 +626,7 @@
           <a:p>
             <a:fld id="{1D8BD707-D9CF-40AE-B4C6-C98DA3205C09}" type="datetimeFigureOut">
               <a:rPr lang="en-US"/>
-              <a:t>11/20/2025</a:t>
+              <a:t>12/1/2025</a:t>
             </a:fld>
             <a:endParaRPr lang="en-US"/>
           </a:p>
@@ -835,7 +835,7 @@
           <a:p>
             <a:fld id="{1D8BD707-D9CF-40AE-B4C6-C98DA3205C09}" type="datetimeFigureOut">
               <a:rPr lang="en-US"/>
-              <a:t>11/20/2025</a:t>
+              <a:t>12/1/2025</a:t>
             </a:fld>
             <a:endParaRPr lang="en-US"/>
           </a:p>
@@ -1051,7 +1051,7 @@
           <a:p>
             <a:fld id="{1D8BD707-D9CF-40AE-B4C6-C98DA3205C09}" type="datetimeFigureOut">
               <a:rPr lang="en-US"/>
-              <a:t>11/20/2025</a:t>
+              <a:t>12/1/2025</a:t>
             </a:fld>
             <a:endParaRPr lang="en-US"/>
           </a:p>
@@ -1201,7 +1201,7 @@
           <a:p>
             <a:fld id="{1D8BD707-D9CF-40AE-B4C6-C98DA3205C09}" type="datetimeFigureOut">
               <a:rPr lang="en-US"/>
-              <a:t>11/20/2025</a:t>
+              <a:t>12/1/2025</a:t>
             </a:fld>
             <a:endParaRPr lang="en-US"/>
           </a:p>
@@ -1322,7 +1322,7 @@
           <a:p>
             <a:fld id="{1D8BD707-D9CF-40AE-B4C6-C98DA3205C09}" type="datetimeFigureOut">
               <a:rPr lang="en-US"/>
-              <a:t>11/20/2025</a:t>
+              <a:t>12/1/2025</a:t>
             </a:fld>
             <a:endParaRPr lang="en-US"/>
           </a:p>
@@ -1549,7 +1549,7 @@
           <a:p>
             <a:fld id="{1D8BD707-D9CF-40AE-B4C6-C98DA3205C09}" type="datetimeFigureOut">
               <a:rPr lang="en-US"/>
-              <a:t>11/20/2025</a:t>
+              <a:t>12/1/2025</a:t>
             </a:fld>
             <a:endParaRPr lang="en-US"/>
           </a:p>
@@ -22824,7 +22824,7 @@
       </p:pic>
       <p:pic>
         <p:nvPicPr>
-          <p:cNvPr id="5" name="object 5"/>
+          <p:cNvPr id="6" name="object 6"/>
           <p:cNvPicPr/>
           <p:nvPr/>
         </p:nvPicPr>
@@ -22836,29 +22836,7 @@
         </p:blipFill>
         <p:spPr>
           <a:xfrm>
-            <a:off x="5240146" y="3438778"/>
-            <a:ext cx="2301367" cy="365760"/>
-          </a:xfrm>
-          <a:prstGeom prst="rect">
-            <a:avLst/>
-          </a:prstGeom>
-        </p:spPr>
-      </p:pic>
-      <p:pic>
-        <p:nvPicPr>
-          <p:cNvPr id="6" name="object 6"/>
-          <p:cNvPicPr/>
-          <p:nvPr/>
-        </p:nvPicPr>
-        <p:blipFill>
-          <a:blip r:embed="rId6" cstate="print"/>
-          <a:stretch>
-            <a:fillRect/>
-          </a:stretch>
-        </p:blipFill>
-        <p:spPr>
-          <a:xfrm>
-            <a:off x="5240146" y="4033139"/>
+            <a:off x="5272659" y="3648203"/>
             <a:ext cx="1891283" cy="365760"/>
           </a:xfrm>
           <a:prstGeom prst="rect">
@@ -22873,7 +22851,7 @@
           <p:nvPr/>
         </p:nvPicPr>
         <p:blipFill>
-          <a:blip r:embed="rId7" cstate="print"/>
+          <a:blip r:embed="rId6" cstate="print"/>
           <a:stretch>
             <a:fillRect/>
           </a:stretch>
